--- a/it/slides/22-Architettura_dei_Calcolatori-Verm1_Parte_4.pptx
+++ b/it/slides/22-Architettura_dei_Calcolatori-Verm1_Parte_4.pptx
@@ -118,7 +118,7 @@
   <p:extLst>
     <p:ext uri="{521415D9-36F7-43E2-AB2F-B90AF26B5E84}">
       <p14:sectionLst xmlns:p14="http://schemas.microsoft.com/office/powerpoint/2010/main">
-        <p14:section name="Apertura" id="{d1260603-1f43-55bd-d723-c9faa277ffc0}">
+        <p14:section name="Apertura" id="{c66d2098-bd4c-0fb2-721a-dd6f1623b139}">
           <p14:sldIdLst>
             <p14:sldId id="256"/>
             <p14:sldId id="257"/>
@@ -126,22 +126,22 @@
             <p14:sldId id="259"/>
           </p14:sldIdLst>
         </p14:section>
-        <p14:section name="Passo 1: il punteggio in cifre" id="{32a285da-764a-bd0f-436b-89ed15153c32}">
+        <p14:section name="Passo 1: il punteggio in cifre" id="{e2fd36dc-147d-4fe7-a582-372f46eb8a9a}">
           <p14:sldIdLst>
             <p14:sldId id="260"/>
           </p14:sldIdLst>
         </p14:section>
-        <p14:section name="Passo 2: i livelli" id="{1a95e29b-5d14-abdd-c0d1-d67867f6abb6}">
+        <p14:section name="Passo 2: i livelli" id="{c1be8f72-3084-bb96-da14-5eb72af2184c}">
           <p14:sldIdLst>
             <p14:sldId id="261"/>
           </p14:sldIdLst>
         </p14:section>
-        <p14:section name="Passo 4: disegnare solo ciò che è cambiato" id="{3b7ee11e-c689-8874-5bf9-2ac69d891144}">
+        <p14:section name="Passo 4: disegnare solo ciò che è cambiato" id="{086a6085-7296-ab6e-7900-cbafe1a0e93e}">
           <p14:sldIdLst>
             <p14:sldId id="262"/>
           </p14:sldIdLst>
         </p14:section>
-        <p14:section name="Passo 5: misurare" id="{2d3d6ec2-b071-0737-a297-0f0c4b80d20d}">
+        <p14:section name="Passo 5: misurare" id="{c49ddc8c-ce6f-93f6-40e9-ddaeabccbf55}">
           <p14:sldIdLst>
             <p14:sldId id="263"/>
             <p14:sldId id="264"/>
@@ -2606,7 +2606,63 @@
       </p:sp>
       <p:sp>
         <p:nvSpPr>
-          <p:cNvPr id="13" name="Shape 11"/>
+          <p:cNvPr id="13" name="Text 11"/>
+          <p:cNvSpPr txBox="1"/>
+          <p:nvPr/>
+        </p:nvSpPr>
+        <p:spPr>
+          <a:xfrm>
+            <a:off x="4693615" y="566928"/>
+            <a:ext cx="6949440" cy="640080"/>
+          </a:xfrm>
+          <a:prstGeom prst="rect">
+            <a:avLst/>
+          </a:prstGeom>
+          <a:noFill/>
+          <a:ln/>
+        </p:spPr>
+        <p:txBody>
+          <a:bodyPr wrap="square" lIns="0" tIns="0" rIns="0" bIns="0" rtlCol="0" anchor="t"/>
+          <a:lstStyle/>
+          <a:p>
+            <a:pPr algn="r" indent="0" marL="0">
+              <a:buNone/>
+            </a:pPr>
+            <a:r>
+              <a:rPr lang="en-US" sz="1300" dirty="0">
+                <a:solidFill>
+                  <a:srgbClr val="CFE3EA"/>
+                </a:solidFill>
+                <a:latin typeface="Calibri" pitchFamily="34" charset="0"/>
+                <a:ea typeface="Calibri" pitchFamily="34" charset="-122"/>
+                <a:cs typeface="Calibri" pitchFamily="34" charset="-120"/>
+              </a:rPr>
+              <a:t>Presentazione della lezione. I listati, il programma completo e come provarlo sono nella presentazione del codice:</a:t>
+            </a:r>
+            <a:endParaRPr lang="en-US" sz="1300" dirty="0"/>
+          </a:p>
+          <a:p>
+            <a:pPr algn="r" indent="0" marL="0">
+              <a:buNone/>
+            </a:pPr>
+            <a:r>
+              <a:rPr lang="en-US" sz="1300" dirty="0">
+                <a:solidFill>
+                  <a:srgbClr val="CFE3EA"/>
+                </a:solidFill>
+                <a:latin typeface="Calibri" pitchFamily="34" charset="0"/>
+                <a:ea typeface="Calibri" pitchFamily="34" charset="-122"/>
+                <a:cs typeface="Calibri" pitchFamily="34" charset="-120"/>
+              </a:rPr>
+              <a:t>22-Architettura_dei_Calcolatori-Verm1_Parte_4-Codice.pptx</a:t>
+            </a:r>
+            <a:endParaRPr lang="en-US" sz="1300" dirty="0"/>
+          </a:p>
+        </p:txBody>
+      </p:sp>
+      <p:sp>
+        <p:nvSpPr>
+          <p:cNvPr id="14" name="Shape 12"/>
           <p:cNvSpPr/>
           <p:nvPr/>
         </p:nvSpPr>
@@ -2633,7 +2689,7 @@
       </p:sp>
       <p:pic>
         <p:nvPicPr>
-          <p:cNvPr id="14" name="Image 0" descr="/Users/raffaelemontella/devel/riscv-prg32/computer-architecture-with-prg32/tools/assets/verm1_p4_play.png">    </p:cNvPr>
+          <p:cNvPr id="15" name="Image 0" descr="/Users/raffaelemontella/devel/riscv-prg32/computer-architecture-with-prg32/tools/assets/verm1_p4_play.png">    </p:cNvPr>
           <p:cNvPicPr>
             <a:picLocks noChangeAspect="1"/>
           </p:cNvPicPr>

--- a/it/slides/22-Architettura_dei_Calcolatori-Verm1_Parte_4.pptx
+++ b/it/slides/22-Architettura_dei_Calcolatori-Verm1_Parte_4.pptx
@@ -118,7 +118,7 @@
   <p:extLst>
     <p:ext uri="{521415D9-36F7-43E2-AB2F-B90AF26B5E84}">
       <p14:sectionLst xmlns:p14="http://schemas.microsoft.com/office/powerpoint/2010/main">
-        <p14:section name="Apertura" id="{c66d2098-bd4c-0fb2-721a-dd6f1623b139}">
+        <p14:section name="Apertura" id="{090a2e2d-ae6d-e02a-6a6c-4cd43078ef88}">
           <p14:sldIdLst>
             <p14:sldId id="256"/>
             <p14:sldId id="257"/>
@@ -126,22 +126,22 @@
             <p14:sldId id="259"/>
           </p14:sldIdLst>
         </p14:section>
-        <p14:section name="Passo 1: il punteggio in cifre" id="{e2fd36dc-147d-4fe7-a582-372f46eb8a9a}">
+        <p14:section name="Passo 1: il punteggio in cifre" id="{a8ea7409-ed24-00ba-8b0f-a53ee3c29e98}">
           <p14:sldIdLst>
             <p14:sldId id="260"/>
           </p14:sldIdLst>
         </p14:section>
-        <p14:section name="Passo 2: i livelli" id="{c1be8f72-3084-bb96-da14-5eb72af2184c}">
+        <p14:section name="Passo 2: i livelli" id="{43ff89d7-3876-e1be-0104-f5f6eb8b953d}">
           <p14:sldIdLst>
             <p14:sldId id="261"/>
           </p14:sldIdLst>
         </p14:section>
-        <p14:section name="Passo 4: disegnare solo ciò che è cambiato" id="{086a6085-7296-ab6e-7900-cbafe1a0e93e}">
+        <p14:section name="Passo 4: disegnare solo ciò che è cambiato" id="{c9ec64bc-7676-21d1-a18f-626a879aaff3}">
           <p14:sldIdLst>
             <p14:sldId id="262"/>
           </p14:sldIdLst>
         </p14:section>
-        <p14:section name="Passo 5: misurare" id="{c49ddc8c-ce6f-93f6-40e9-ddaeabccbf55}">
+        <p14:section name="Passo 5: misurare" id="{5c9a41f2-5298-a57b-9794-bad8f1c9884d}">
           <p14:sldIdLst>
             <p14:sldId id="263"/>
             <p14:sldId id="264"/>
@@ -555,6 +555,8 @@
             <a:r>
               <a:rPr lang="en-US" dirty="0"/>
               <a:t>Il quarto e ultimo tutorial completa Verm1. Nella Parte 3 il gioco era completo nelle regole; oggi diventa completo come programma. Il punteggio è scritto in cifre, il verme accelera, ci sono due suoni, e lo schermo viene ridisegnato solo dove cambia. La frase di Knuth in copertina spiega l'ordine del lavoro: prima il gioco è stato fatto funzionare, e solo adesso, con una misura in mano, lo rendiamo veloce.
+Stato di apprendimento: DA COMPRENDERE OGGI, alla fine di questa lezione lo spiegate, lo seguite passo passo e lo applicate da soli; DA UTILIZZARE OGGI, oggi seguite e usate la ricetta; come funziona dentro si spiega più avanti, o non fa parte del corso; DA COMPRENDERE PIÙ AVANTI, riconoscete il nome e lo scopo; lo spiega una lezione successiva. Una slide senza etichetta è contesto: una storia, un esempio, una domanda, un esercizio.
+Stato di apprendimento di questa lezione. DA COMPRENDERE OGGI: quoziente e resto; caratteri e stringhe; la virgola fissa; la convenzione di chiamata; gli array in memoria; macchine a stati finiti; il frame buffer; il ciclo del processore. DA UTILIZZARE OGGI: gli strumenti di PRG32, il debugger di PRG32-QT (si usa, non si studia, in questo corso). DA COMPRENDERE PIÙ AVANTI: niente. Una slide senza etichetta è contesto: una storia, un esempio, una domanda, un esercizio.
 Per il docente: Quarto tutorial del progetto. Usa le Lezioni da 18 a 21: i registri per convenzione, lo stack, moltiplicazione e divisione (18), il ciclo del processore e il costo di un'istruzione (19), il frame buffer e il costo del disegno (20), ingresso, suono e il runtime come padrone dei dispositivi (21). Il file di riferimento è verm1/verm1_part4.S. La frase di Knuth è il motto giusto: il gioco è stato fatto funzionare nella Parte 3, e solo adesso, con una misura in mano, lo rendiamo veloce.</a:t>
             </a:r>
             <a:endParaRPr lang="en-US" dirty="0"/>
@@ -826,6 +828,7 @@
             <a:r>
               <a:rPr lang="en-US" dirty="0"/>
               <a:t>Verm1 è finito: circa seicento righe di assembly RISC-V, tutte vostre. È cominciato come tre funzioni che ritornano ed è cresciuto un passo eseguibile alla volta, e dentro c'è ogni parte del corso: numeri, logica, stato, memoria, chiamate, pixel, dispositivi. Manca una cosa: un programma che solo il suo autore può eseguire è finito a metà. La prossima lezione gli dà un nome, un'icona e i crediti, e lo pubblica.
+Stato di apprendimento, riepilogo. DA COMPRENDERE OGGI: quoziente e resto; caratteri e stringhe; la virgola fissa; la convenzione di chiamata; gli array in memoria; macchine a stati finiti; il frame buffer; il ciclo del processore. DA UTILIZZARE OGGI: gli strumenti di PRG32, il debugger di PRG32-QT (si usa, non si studia, in questo corso). DA COMPRENDERE PIÙ AVANTI: niente. Una slide senza etichetta è contesto: una storia, un esempio, una domanda, un esercizio.
 Per il docente: Chiedete agli studenti di portare la propria variante alla Lezione 23: il bundle che preparano deve essere del loro gioco, non del riferimento.</a:t>
             </a:r>
             <a:endParaRPr lang="en-US" dirty="0"/>
@@ -1181,6 +1184,7 @@
             <a:r>
               <a:rPr lang="en-US" dirty="0"/>
               <a:t>La variabile score contiene un numero binario: 137 è il byte 0x89. Lo schermo vuole tre caratteri, i byte 0x31, 0x33 e 0x37. La conversione è quella che avete fatto a mano nella Lezione 05: si divide per dieci, e il resto è una cifra; si ripete sul quoziente. Le cifre escono da destra, prima le unità, quindi si memorizzano dall'ultimo carattere al primo. Una cifra diventa un carattere sommando 48, il codice ASCII del carattere zero.
+DA COMPRENDERE OGGI: quoziente e resto.
 Per il docente: La conversione della Lezione 05, fatta dal programma invece che a mano. remu dà il resto, divu il quoziente: due istruzioni dell'estensione M.</a:t>
             </a:r>
             <a:endParaRPr lang="en-US" dirty="0"/>
@@ -1270,6 +1274,7 @@
             <a:r>
               <a:rPr lang="en-US" dirty="0"/>
               <a:t>I livelli in numeri. Per ogni punteggio, la velocità, i frame per passo, cioè 256 diviso la velocità, e le celle al secondo a trenta frame al secondo. Da 3,75 celle al secondo all'inizio a 11,25 dai sedici punti in poi. I frame per passo non sono sempre numeri interi, e non è un problema: a 48 i passi arrivano ogni cinque o sei frame, 5,33 in media. È ciò che vi dà la virgola fissa.
+DA COMPRENDERE OGGI: la virgola fissa.
 Per il docente: 256 diviso la velocità dà i frame per passo; la frequenza dei frame per la velocità diviso 256 dà le celle al secondo. Chiedete agli studenti la riga del punteggio 2.</a:t>
             </a:r>
             <a:endParaRPr lang="en-US" dirty="0"/>
@@ -1359,6 +1364,7 @@
             <a:r>
               <a:rPr lang="en-US" dirty="0"/>
               <a:t>Quanto costa un frame della Parte 3? Cancella 64.000 pixel e ridisegna titolo, punteggio, verme e cibo, trenta volte al secondo. Eppure tra due passi sullo schermo non cambia nulla, e un passo cambia pochissimo: la cella lasciata dalla coda, la vecchia testa che diventa corpo, la nuova testa, e a volte il cibo e il punteggio. Quindi si ricorda che cosa è cambiato e si disegna solo quello. Funziona perché il frame buffer è memoria: l'immagine resta lì da sola.
+DA COMPRENDERE OGGI: il frame buffer.
 Per il docente: Lezione 20: lo schermo è un array di pixel che conserva il suo contenuto. Un verme di 200 celle costa 200 rettangoli per frame nella Parte 3 e tre per passo nella Parte 4. È ciò che facevano i vecchi home computer, perché non avevano scelta.</a:t>
             </a:r>
             <a:endParaRPr lang="en-US" dirty="0"/>
@@ -1448,6 +1454,7 @@
             <a:r>
               <a:rPr lang="en-US" dirty="0"/>
               <a:t>Sei azioni. Eseguite il gioco finito in modalità debug e avviate una partita. Leggete la telemetria per dieci secondi. Confrontate con i numeri della Parte 3 annotati all'inizio. Fate crescere il verme fino a venti celle in entrambe le versioni e rileggete: in una il costo cresce con il verme, nell'altra no. Mettete un breakpoint su draw_changes e verificate che si ferma una volta per passo. Annotate i numeri: andranno nella descrizione del vostro gioco.
+DA COMPRENDERE OGGI: il ciclo del processore. DA UTILIZZARE OGGI: il debugger di PRG32-QT (si usa, non si studia, in questo corso).
 Per il docente: La telemetria conta le istruzioni della cartuccia, non quelle del runtime che riempie i rettangoli, quindi il risparmio reale sulla scheda è più grande di quanto mostri il conteggio: lì ogni pixel viaggia anche su SPI verso il display. Non date numeri agli studenti: fateli misurare.</a:t>
             </a:r>
             <a:endParaRPr lang="en-US" dirty="0"/>
@@ -1537,6 +1544,7 @@
             <a:r>
               <a:rPr lang="en-US" dirty="0"/>
               <a:t>Seguite una chiamata con il debugger. Fermatevi sulla chiamata a to_decimal e leggete a0, a1, ra e sp. Un passo: il PC salta dentro la funzione e ra contiene l'indirizzo dell'istruzione dopo la chiamata. Proseguite: cambiano solo i temporanei e sp non si muove mai, perché è una foglia. A ret il PC prende il valore di ra. Poi fate lo stesso con draw_text: sp scende di 16, ra viene memorizzato e poi ripreso.
+DA COMPRENDERE OGGI: la convenzione di chiamata. DA UTILIZZARE OGGI: il debugger di PRG32-QT (si usa, non si studia, in questo corso).
 Per il docente: La convenzione di chiamata della Lezione 18, osservata istruzione per istruzione. Nel listato call compare come jal, o come auipc seguita da jalr, e ret come c.jr ra.</a:t>
             </a:r>
             <a:endParaRPr lang="en-US" dirty="0"/>
@@ -2713,6 +2721,420 @@
       </p:pic>
       <p:sp>
         <p:nvSpPr>
+          <p:cNvPr id="16" name="Shape 13"/>
+          <p:cNvSpPr/>
+          <p:nvPr/>
+        </p:nvSpPr>
+        <p:spPr>
+          <a:xfrm>
+            <a:off x="8910777" y="91440"/>
+            <a:ext cx="2732278" cy="274320"/>
+          </a:xfrm>
+          <a:prstGeom prst="rect">
+            <a:avLst/>
+          </a:prstGeom>
+          <a:solidFill>
+            <a:srgbClr val="F3E8FF"/>
+          </a:solidFill>
+          <a:ln w="12700">
+            <a:solidFill>
+              <a:srgbClr val="7E22CE"/>
+            </a:solidFill>
+            <a:prstDash val="dash"/>
+          </a:ln>
+        </p:spPr>
+      </p:sp>
+      <p:sp>
+        <p:nvSpPr>
+          <p:cNvPr id="17" name="Shape 14"/>
+          <p:cNvSpPr/>
+          <p:nvPr/>
+        </p:nvSpPr>
+        <p:spPr>
+          <a:xfrm>
+            <a:off x="8938209" y="128016"/>
+            <a:ext cx="45720" cy="45720"/>
+          </a:xfrm>
+          <a:prstGeom prst="rect">
+            <a:avLst/>
+          </a:prstGeom>
+          <a:solidFill>
+            <a:srgbClr val="7E22CE"/>
+          </a:solidFill>
+          <a:ln w="12700">
+            <a:solidFill>
+              <a:srgbClr val="7E22CE"/>
+            </a:solidFill>
+            <a:prstDash val="solid"/>
+          </a:ln>
+        </p:spPr>
+      </p:sp>
+      <p:sp>
+        <p:nvSpPr>
+          <p:cNvPr id="18" name="Shape 15"/>
+          <p:cNvSpPr/>
+          <p:nvPr/>
+        </p:nvSpPr>
+        <p:spPr>
+          <a:xfrm>
+            <a:off x="8938209" y="205740"/>
+            <a:ext cx="45720" cy="45720"/>
+          </a:xfrm>
+          <a:prstGeom prst="rect">
+            <a:avLst/>
+          </a:prstGeom>
+          <a:solidFill>
+            <a:srgbClr val="7E22CE"/>
+          </a:solidFill>
+          <a:ln w="12700">
+            <a:solidFill>
+              <a:srgbClr val="7E22CE"/>
+            </a:solidFill>
+            <a:prstDash val="solid"/>
+          </a:ln>
+        </p:spPr>
+      </p:sp>
+      <p:sp>
+        <p:nvSpPr>
+          <p:cNvPr id="19" name="Shape 16"/>
+          <p:cNvSpPr/>
+          <p:nvPr/>
+        </p:nvSpPr>
+        <p:spPr>
+          <a:xfrm>
+            <a:off x="8938209" y="283464"/>
+            <a:ext cx="45720" cy="45720"/>
+          </a:xfrm>
+          <a:prstGeom prst="rect">
+            <a:avLst/>
+          </a:prstGeom>
+          <a:solidFill>
+            <a:srgbClr val="7E22CE"/>
+          </a:solidFill>
+          <a:ln w="12700">
+            <a:solidFill>
+              <a:srgbClr val="7E22CE"/>
+            </a:solidFill>
+            <a:prstDash val="solid"/>
+          </a:ln>
+        </p:spPr>
+      </p:sp>
+      <p:pic>
+        <p:nvPicPr>
+          <p:cNvPr id="20" name="Image 1" descr="preencoded.png">    </p:cNvPr>
+          <p:cNvPicPr>
+            <a:picLocks noChangeAspect="1"/>
+          </p:cNvPicPr>
+          <p:nvPr/>
+        </p:nvPicPr>
+        <p:blipFill>
+          <a:blip r:embed="rId2"/>
+          <a:stretch>
+            <a:fillRect/>
+          </a:stretch>
+        </p:blipFill>
+        <p:spPr>
+          <a:xfrm>
+            <a:off x="9038793" y="128016"/>
+            <a:ext cx="201168" cy="201168"/>
+          </a:xfrm>
+          <a:prstGeom prst="rect">
+            <a:avLst/>
+          </a:prstGeom>
+        </p:spPr>
+      </p:pic>
+      <p:sp>
+        <p:nvSpPr>
+          <p:cNvPr id="21" name="Text 17"/>
+          <p:cNvSpPr txBox="1"/>
+          <p:nvPr/>
+        </p:nvSpPr>
+        <p:spPr>
+          <a:xfrm>
+            <a:off x="9294825" y="91440"/>
+            <a:ext cx="2311654" cy="274320"/>
+          </a:xfrm>
+          <a:prstGeom prst="rect">
+            <a:avLst/>
+          </a:prstGeom>
+          <a:noFill/>
+          <a:ln/>
+        </p:spPr>
+        <p:txBody>
+          <a:bodyPr wrap="square" lIns="0" tIns="0" rIns="0" bIns="0" rtlCol="0" anchor="ctr"/>
+          <a:lstStyle/>
+          <a:p>
+            <a:pPr indent="0" marL="0">
+              <a:buNone/>
+            </a:pPr>
+            <a:r>
+              <a:rPr lang="en-US" sz="1100" b="1" dirty="0">
+                <a:solidFill>
+                  <a:srgbClr val="6B21A8"/>
+                </a:solidFill>
+                <a:latin typeface="Calibri" pitchFamily="34" charset="0"/>
+                <a:ea typeface="Calibri" pitchFamily="34" charset="-122"/>
+                <a:cs typeface="Calibri" pitchFamily="34" charset="-120"/>
+              </a:rPr>
+              <a:t>DA COMPRENDERE PIÙ AVANTI</a:t>
+            </a:r>
+            <a:endParaRPr lang="en-US" sz="1100" dirty="0"/>
+          </a:p>
+        </p:txBody>
+      </p:sp>
+      <p:sp>
+        <p:nvSpPr>
+          <p:cNvPr id="22" name="Shape 18"/>
+          <p:cNvSpPr/>
+          <p:nvPr/>
+        </p:nvSpPr>
+        <p:spPr>
+          <a:xfrm>
+            <a:off x="6675069" y="91440"/>
+            <a:ext cx="2125980" cy="274320"/>
+          </a:xfrm>
+          <a:prstGeom prst="rect">
+            <a:avLst/>
+          </a:prstGeom>
+          <a:solidFill>
+            <a:srgbClr val="FEF3C7"/>
+          </a:solidFill>
+          <a:ln w="12700">
+            <a:solidFill>
+              <a:srgbClr val="B45309"/>
+            </a:solidFill>
+            <a:prstDash val="solid"/>
+          </a:ln>
+        </p:spPr>
+      </p:sp>
+      <p:sp>
+        <p:nvSpPr>
+          <p:cNvPr id="23" name="Shape 19"/>
+          <p:cNvSpPr/>
+          <p:nvPr/>
+        </p:nvSpPr>
+        <p:spPr>
+          <a:xfrm>
+            <a:off x="6675069" y="91440"/>
+            <a:ext cx="27432" cy="274320"/>
+          </a:xfrm>
+          <a:prstGeom prst="rect">
+            <a:avLst/>
+          </a:prstGeom>
+          <a:solidFill>
+            <a:srgbClr val="B45309"/>
+          </a:solidFill>
+          <a:ln w="12700">
+            <a:solidFill>
+              <a:srgbClr val="B45309"/>
+            </a:solidFill>
+            <a:prstDash val="solid"/>
+          </a:ln>
+        </p:spPr>
+      </p:sp>
+      <p:sp>
+        <p:nvSpPr>
+          <p:cNvPr id="24" name="Shape 20"/>
+          <p:cNvSpPr/>
+          <p:nvPr/>
+        </p:nvSpPr>
+        <p:spPr>
+          <a:xfrm>
+            <a:off x="6729933" y="91440"/>
+            <a:ext cx="27432" cy="274320"/>
+          </a:xfrm>
+          <a:prstGeom prst="rect">
+            <a:avLst/>
+          </a:prstGeom>
+          <a:solidFill>
+            <a:srgbClr val="B45309"/>
+          </a:solidFill>
+          <a:ln w="12700">
+            <a:solidFill>
+              <a:srgbClr val="B45309"/>
+            </a:solidFill>
+            <a:prstDash val="solid"/>
+          </a:ln>
+        </p:spPr>
+      </p:sp>
+      <p:pic>
+        <p:nvPicPr>
+          <p:cNvPr id="25" name="Image 2" descr="preencoded.png">    </p:cNvPr>
+          <p:cNvPicPr>
+            <a:picLocks noChangeAspect="1"/>
+          </p:cNvPicPr>
+          <p:nvPr/>
+        </p:nvPicPr>
+        <p:blipFill>
+          <a:blip r:embed="rId3"/>
+          <a:stretch>
+            <a:fillRect/>
+          </a:stretch>
+        </p:blipFill>
+        <p:spPr>
+          <a:xfrm>
+            <a:off x="6803085" y="128016"/>
+            <a:ext cx="201168" cy="201168"/>
+          </a:xfrm>
+          <a:prstGeom prst="rect">
+            <a:avLst/>
+          </a:prstGeom>
+        </p:spPr>
+      </p:pic>
+      <p:sp>
+        <p:nvSpPr>
+          <p:cNvPr id="26" name="Text 21"/>
+          <p:cNvSpPr txBox="1"/>
+          <p:nvPr/>
+        </p:nvSpPr>
+        <p:spPr>
+          <a:xfrm>
+            <a:off x="7059117" y="91440"/>
+            <a:ext cx="1705356" cy="274320"/>
+          </a:xfrm>
+          <a:prstGeom prst="rect">
+            <a:avLst/>
+          </a:prstGeom>
+          <a:noFill/>
+          <a:ln/>
+        </p:spPr>
+        <p:txBody>
+          <a:bodyPr wrap="square" lIns="0" tIns="0" rIns="0" bIns="0" rtlCol="0" anchor="ctr"/>
+          <a:lstStyle/>
+          <a:p>
+            <a:pPr indent="0" marL="0">
+              <a:buNone/>
+            </a:pPr>
+            <a:r>
+              <a:rPr lang="en-US" sz="1100" b="1" dirty="0">
+                <a:solidFill>
+                  <a:srgbClr val="92400E"/>
+                </a:solidFill>
+                <a:latin typeface="Calibri" pitchFamily="34" charset="0"/>
+                <a:ea typeface="Calibri" pitchFamily="34" charset="-122"/>
+                <a:cs typeface="Calibri" pitchFamily="34" charset="-120"/>
+              </a:rPr>
+              <a:t>DA UTILIZZARE OGGI</a:t>
+            </a:r>
+            <a:endParaRPr lang="en-US" sz="1100" dirty="0"/>
+          </a:p>
+        </p:txBody>
+      </p:sp>
+      <p:sp>
+        <p:nvSpPr>
+          <p:cNvPr id="27" name="Shape 22"/>
+          <p:cNvSpPr/>
+          <p:nvPr/>
+        </p:nvSpPr>
+        <p:spPr>
+          <a:xfrm>
+            <a:off x="4352747" y="91440"/>
+            <a:ext cx="2212594" cy="274320"/>
+          </a:xfrm>
+          <a:prstGeom prst="rect">
+            <a:avLst/>
+          </a:prstGeom>
+          <a:solidFill>
+            <a:srgbClr val="E0F2FE"/>
+          </a:solidFill>
+          <a:ln w="12700">
+            <a:solidFill>
+              <a:srgbClr val="0369A1"/>
+            </a:solidFill>
+            <a:prstDash val="solid"/>
+          </a:ln>
+        </p:spPr>
+      </p:sp>
+      <p:sp>
+        <p:nvSpPr>
+          <p:cNvPr id="28" name="Shape 23"/>
+          <p:cNvSpPr/>
+          <p:nvPr/>
+        </p:nvSpPr>
+        <p:spPr>
+          <a:xfrm>
+            <a:off x="4352747" y="91440"/>
+            <a:ext cx="73152" cy="274320"/>
+          </a:xfrm>
+          <a:prstGeom prst="rect">
+            <a:avLst/>
+          </a:prstGeom>
+          <a:solidFill>
+            <a:srgbClr val="0369A1"/>
+          </a:solidFill>
+          <a:ln w="12700">
+            <a:solidFill>
+              <a:srgbClr val="0369A1"/>
+            </a:solidFill>
+            <a:prstDash val="solid"/>
+          </a:ln>
+        </p:spPr>
+      </p:sp>
+      <p:pic>
+        <p:nvPicPr>
+          <p:cNvPr id="29" name="Image 3" descr="preencoded.png">    </p:cNvPr>
+          <p:cNvPicPr>
+            <a:picLocks noChangeAspect="1"/>
+          </p:cNvPicPr>
+          <p:nvPr/>
+        </p:nvPicPr>
+        <p:blipFill>
+          <a:blip r:embed="rId4"/>
+          <a:stretch>
+            <a:fillRect/>
+          </a:stretch>
+        </p:blipFill>
+        <p:spPr>
+          <a:xfrm>
+            <a:off x="4480763" y="128016"/>
+            <a:ext cx="201168" cy="201168"/>
+          </a:xfrm>
+          <a:prstGeom prst="rect">
+            <a:avLst/>
+          </a:prstGeom>
+        </p:spPr>
+      </p:pic>
+      <p:sp>
+        <p:nvSpPr>
+          <p:cNvPr id="30" name="Text 24"/>
+          <p:cNvSpPr txBox="1"/>
+          <p:nvPr/>
+        </p:nvSpPr>
+        <p:spPr>
+          <a:xfrm>
+            <a:off x="4736795" y="91440"/>
+            <a:ext cx="1791970" cy="274320"/>
+          </a:xfrm>
+          <a:prstGeom prst="rect">
+            <a:avLst/>
+          </a:prstGeom>
+          <a:noFill/>
+          <a:ln/>
+        </p:spPr>
+        <p:txBody>
+          <a:bodyPr wrap="square" lIns="0" tIns="0" rIns="0" bIns="0" rtlCol="0" anchor="ctr"/>
+          <a:lstStyle/>
+          <a:p>
+            <a:pPr indent="0" marL="0">
+              <a:buNone/>
+            </a:pPr>
+            <a:r>
+              <a:rPr lang="en-US" sz="1100" b="1" dirty="0">
+                <a:solidFill>
+                  <a:srgbClr val="075985"/>
+                </a:solidFill>
+                <a:latin typeface="Calibri" pitchFamily="34" charset="0"/>
+                <a:ea typeface="Calibri" pitchFamily="34" charset="-122"/>
+                <a:cs typeface="Calibri" pitchFamily="34" charset="-120"/>
+              </a:rPr>
+              <a:t>DA COMPRENDERE OGGI</a:t>
+            </a:r>
+            <a:endParaRPr lang="en-US" sz="1100" dirty="0"/>
+          </a:p>
+        </p:txBody>
+      </p:sp>
+      <p:sp>
+        <p:nvSpPr>
           <p:cNvPr id="25" name="Slide Number Placeholder 0"/>
           <p:cNvSpPr>
             <a:spLocks noGrp="1"/>
@@ -8514,6 +8936,133 @@
               <a:t>0x89 in memoria; 0x31 0x33 0x37 sullo schermo</a:t>
             </a:r>
             <a:endParaRPr lang="en-US" sz="1900" dirty="0"/>
+          </a:p>
+        </p:txBody>
+      </p:sp>
+      <p:sp>
+        <p:nvSpPr>
+          <p:cNvPr id="16" name="Shape 14"/>
+          <p:cNvSpPr/>
+          <p:nvPr/>
+        </p:nvSpPr>
+        <p:spPr>
+          <a:xfrm>
+            <a:off x="8117281" y="91440"/>
+            <a:ext cx="3525774" cy="274320"/>
+          </a:xfrm>
+          <a:prstGeom prst="rect">
+            <a:avLst/>
+          </a:prstGeom>
+          <a:solidFill>
+            <a:srgbClr val="E0F2FE"/>
+          </a:solidFill>
+          <a:ln w="12700">
+            <a:solidFill>
+              <a:srgbClr val="0369A1"/>
+            </a:solidFill>
+            <a:prstDash val="solid"/>
+          </a:ln>
+        </p:spPr>
+      </p:sp>
+      <p:sp>
+        <p:nvSpPr>
+          <p:cNvPr id="17" name="Shape 15"/>
+          <p:cNvSpPr/>
+          <p:nvPr/>
+        </p:nvSpPr>
+        <p:spPr>
+          <a:xfrm>
+            <a:off x="8117281" y="91440"/>
+            <a:ext cx="73152" cy="274320"/>
+          </a:xfrm>
+          <a:prstGeom prst="rect">
+            <a:avLst/>
+          </a:prstGeom>
+          <a:solidFill>
+            <a:srgbClr val="0369A1"/>
+          </a:solidFill>
+          <a:ln w="12700">
+            <a:solidFill>
+              <a:srgbClr val="0369A1"/>
+            </a:solidFill>
+            <a:prstDash val="solid"/>
+          </a:ln>
+        </p:spPr>
+      </p:sp>
+      <p:pic>
+        <p:nvPicPr>
+          <p:cNvPr id="18" name="Image 0" descr="preencoded.png">    </p:cNvPr>
+          <p:cNvPicPr>
+            <a:picLocks noChangeAspect="1"/>
+          </p:cNvPicPr>
+          <p:nvPr/>
+        </p:nvPicPr>
+        <p:blipFill>
+          <a:blip r:embed="rId1"/>
+          <a:stretch>
+            <a:fillRect/>
+          </a:stretch>
+        </p:blipFill>
+        <p:spPr>
+          <a:xfrm>
+            <a:off x="8245297" y="128016"/>
+            <a:ext cx="201168" cy="201168"/>
+          </a:xfrm>
+          <a:prstGeom prst="rect">
+            <a:avLst/>
+          </a:prstGeom>
+        </p:spPr>
+      </p:pic>
+      <p:sp>
+        <p:nvSpPr>
+          <p:cNvPr id="19" name="Text 16"/>
+          <p:cNvSpPr txBox="1"/>
+          <p:nvPr/>
+        </p:nvSpPr>
+        <p:spPr>
+          <a:xfrm>
+            <a:off x="8501329" y="91440"/>
+            <a:ext cx="3105150" cy="274320"/>
+          </a:xfrm>
+          <a:prstGeom prst="rect">
+            <a:avLst/>
+          </a:prstGeom>
+          <a:noFill/>
+          <a:ln/>
+        </p:spPr>
+        <p:txBody>
+          <a:bodyPr wrap="square" lIns="0" tIns="0" rIns="0" bIns="0" rtlCol="0" anchor="ctr"/>
+          <a:lstStyle/>
+          <a:p>
+            <a:pPr indent="0" marL="0">
+              <a:buNone/>
+            </a:pPr>
+            <a:r>
+              <a:rPr lang="en-US" sz="1100" b="1" dirty="0">
+                <a:solidFill>
+                  <a:srgbClr val="075985"/>
+                </a:solidFill>
+                <a:latin typeface="Calibri" pitchFamily="34" charset="0"/>
+                <a:ea typeface="Calibri" pitchFamily="34" charset="-122"/>
+                <a:cs typeface="Calibri" pitchFamily="34" charset="-120"/>
+              </a:rPr>
+              <a:t>DA COMPRENDERE OGGI</a:t>
+            </a:r>
+            <a:pPr indent="0" marL="0">
+              <a:buNone/>
+            </a:pPr>
+            <a:r>
+              <a:rPr lang="en-US" sz="1100" dirty="0">
+                <a:solidFill>
+                  <a:srgbClr val="075985"/>
+                </a:solidFill>
+                <a:latin typeface="Calibri" pitchFamily="34" charset="0"/>
+                <a:ea typeface="Calibri" pitchFamily="34" charset="-122"/>
+                <a:cs typeface="Calibri" pitchFamily="34" charset="-120"/>
+              </a:rPr>
+              <a:t> · quoziente e resto</a:t>
+            </a:r>
+            <a:endParaRPr lang="en-US" sz="1100" dirty="0"/>
           </a:p>
         </p:txBody>
       </p:sp>
@@ -10348,6 +10897,133 @@
       </p:sp>
       <p:sp>
         <p:nvSpPr>
+          <p:cNvPr id="5" name="Shape 2"/>
+          <p:cNvSpPr/>
+          <p:nvPr/>
+        </p:nvSpPr>
+        <p:spPr>
+          <a:xfrm>
+            <a:off x="8182940" y="91440"/>
+            <a:ext cx="3460115" cy="274320"/>
+          </a:xfrm>
+          <a:prstGeom prst="rect">
+            <a:avLst/>
+          </a:prstGeom>
+          <a:solidFill>
+            <a:srgbClr val="E0F2FE"/>
+          </a:solidFill>
+          <a:ln w="12700">
+            <a:solidFill>
+              <a:srgbClr val="0369A1"/>
+            </a:solidFill>
+            <a:prstDash val="solid"/>
+          </a:ln>
+        </p:spPr>
+      </p:sp>
+      <p:sp>
+        <p:nvSpPr>
+          <p:cNvPr id="6" name="Shape 3"/>
+          <p:cNvSpPr/>
+          <p:nvPr/>
+        </p:nvSpPr>
+        <p:spPr>
+          <a:xfrm>
+            <a:off x="8182940" y="91440"/>
+            <a:ext cx="73152" cy="274320"/>
+          </a:xfrm>
+          <a:prstGeom prst="rect">
+            <a:avLst/>
+          </a:prstGeom>
+          <a:solidFill>
+            <a:srgbClr val="0369A1"/>
+          </a:solidFill>
+          <a:ln w="12700">
+            <a:solidFill>
+              <a:srgbClr val="0369A1"/>
+            </a:solidFill>
+            <a:prstDash val="solid"/>
+          </a:ln>
+        </p:spPr>
+      </p:sp>
+      <p:pic>
+        <p:nvPicPr>
+          <p:cNvPr id="7" name="Image 0" descr="preencoded.png">    </p:cNvPr>
+          <p:cNvPicPr>
+            <a:picLocks noChangeAspect="1"/>
+          </p:cNvPicPr>
+          <p:nvPr/>
+        </p:nvPicPr>
+        <p:blipFill>
+          <a:blip r:embed="rId1"/>
+          <a:stretch>
+            <a:fillRect/>
+          </a:stretch>
+        </p:blipFill>
+        <p:spPr>
+          <a:xfrm>
+            <a:off x="8310956" y="128016"/>
+            <a:ext cx="201168" cy="201168"/>
+          </a:xfrm>
+          <a:prstGeom prst="rect">
+            <a:avLst/>
+          </a:prstGeom>
+        </p:spPr>
+      </p:pic>
+      <p:sp>
+        <p:nvSpPr>
+          <p:cNvPr id="8" name="Text 4"/>
+          <p:cNvSpPr txBox="1"/>
+          <p:nvPr/>
+        </p:nvSpPr>
+        <p:spPr>
+          <a:xfrm>
+            <a:off x="8566988" y="91440"/>
+            <a:ext cx="3039491" cy="274320"/>
+          </a:xfrm>
+          <a:prstGeom prst="rect">
+            <a:avLst/>
+          </a:prstGeom>
+          <a:noFill/>
+          <a:ln/>
+        </p:spPr>
+        <p:txBody>
+          <a:bodyPr wrap="square" lIns="0" tIns="0" rIns="0" bIns="0" rtlCol="0" anchor="ctr"/>
+          <a:lstStyle/>
+          <a:p>
+            <a:pPr indent="0" marL="0">
+              <a:buNone/>
+            </a:pPr>
+            <a:r>
+              <a:rPr lang="en-US" sz="1100" b="1" dirty="0">
+                <a:solidFill>
+                  <a:srgbClr val="075985"/>
+                </a:solidFill>
+                <a:latin typeface="Calibri" pitchFamily="34" charset="0"/>
+                <a:ea typeface="Calibri" pitchFamily="34" charset="-122"/>
+                <a:cs typeface="Calibri" pitchFamily="34" charset="-120"/>
+              </a:rPr>
+              <a:t>DA COMPRENDERE OGGI</a:t>
+            </a:r>
+            <a:pPr indent="0" marL="0">
+              <a:buNone/>
+            </a:pPr>
+            <a:r>
+              <a:rPr lang="en-US" sz="1100" dirty="0">
+                <a:solidFill>
+                  <a:srgbClr val="075985"/>
+                </a:solidFill>
+                <a:latin typeface="Calibri" pitchFamily="34" charset="0"/>
+                <a:ea typeface="Calibri" pitchFamily="34" charset="-122"/>
+                <a:cs typeface="Calibri" pitchFamily="34" charset="-120"/>
+              </a:rPr>
+              <a:t> · la virgola fissa</a:t>
+            </a:r>
+            <a:endParaRPr lang="en-US" sz="1100" dirty="0"/>
+          </a:p>
+        </p:txBody>
+      </p:sp>
+      <p:sp>
+        <p:nvSpPr>
           <p:cNvPr id="25" name="Slide Number Placeholder 0"/>
           <p:cNvSpPr>
             <a:spLocks noGrp="1"/>
@@ -10962,6 +11638,133 @@
       </p:sp>
       <p:sp>
         <p:nvSpPr>
+          <p:cNvPr id="16" name="Shape 14"/>
+          <p:cNvSpPr/>
+          <p:nvPr/>
+        </p:nvSpPr>
+        <p:spPr>
+          <a:xfrm>
+            <a:off x="8248599" y="91440"/>
+            <a:ext cx="3394456" cy="274320"/>
+          </a:xfrm>
+          <a:prstGeom prst="rect">
+            <a:avLst/>
+          </a:prstGeom>
+          <a:solidFill>
+            <a:srgbClr val="E0F2FE"/>
+          </a:solidFill>
+          <a:ln w="12700">
+            <a:solidFill>
+              <a:srgbClr val="0369A1"/>
+            </a:solidFill>
+            <a:prstDash val="solid"/>
+          </a:ln>
+        </p:spPr>
+      </p:sp>
+      <p:sp>
+        <p:nvSpPr>
+          <p:cNvPr id="17" name="Shape 15"/>
+          <p:cNvSpPr/>
+          <p:nvPr/>
+        </p:nvSpPr>
+        <p:spPr>
+          <a:xfrm>
+            <a:off x="8248599" y="91440"/>
+            <a:ext cx="73152" cy="274320"/>
+          </a:xfrm>
+          <a:prstGeom prst="rect">
+            <a:avLst/>
+          </a:prstGeom>
+          <a:solidFill>
+            <a:srgbClr val="0369A1"/>
+          </a:solidFill>
+          <a:ln w="12700">
+            <a:solidFill>
+              <a:srgbClr val="0369A1"/>
+            </a:solidFill>
+            <a:prstDash val="solid"/>
+          </a:ln>
+        </p:spPr>
+      </p:sp>
+      <p:pic>
+        <p:nvPicPr>
+          <p:cNvPr id="18" name="Image 0" descr="preencoded.png">    </p:cNvPr>
+          <p:cNvPicPr>
+            <a:picLocks noChangeAspect="1"/>
+          </p:cNvPicPr>
+          <p:nvPr/>
+        </p:nvPicPr>
+        <p:blipFill>
+          <a:blip r:embed="rId1"/>
+          <a:stretch>
+            <a:fillRect/>
+          </a:stretch>
+        </p:blipFill>
+        <p:spPr>
+          <a:xfrm>
+            <a:off x="8376615" y="128016"/>
+            <a:ext cx="201168" cy="201168"/>
+          </a:xfrm>
+          <a:prstGeom prst="rect">
+            <a:avLst/>
+          </a:prstGeom>
+        </p:spPr>
+      </p:pic>
+      <p:sp>
+        <p:nvSpPr>
+          <p:cNvPr id="19" name="Text 16"/>
+          <p:cNvSpPr txBox="1"/>
+          <p:nvPr/>
+        </p:nvSpPr>
+        <p:spPr>
+          <a:xfrm>
+            <a:off x="8632647" y="91440"/>
+            <a:ext cx="2973832" cy="274320"/>
+          </a:xfrm>
+          <a:prstGeom prst="rect">
+            <a:avLst/>
+          </a:prstGeom>
+          <a:noFill/>
+          <a:ln/>
+        </p:spPr>
+        <p:txBody>
+          <a:bodyPr wrap="square" lIns="0" tIns="0" rIns="0" bIns="0" rtlCol="0" anchor="ctr"/>
+          <a:lstStyle/>
+          <a:p>
+            <a:pPr indent="0" marL="0">
+              <a:buNone/>
+            </a:pPr>
+            <a:r>
+              <a:rPr lang="en-US" sz="1100" b="1" dirty="0">
+                <a:solidFill>
+                  <a:srgbClr val="075985"/>
+                </a:solidFill>
+                <a:latin typeface="Calibri" pitchFamily="34" charset="0"/>
+                <a:ea typeface="Calibri" pitchFamily="34" charset="-122"/>
+                <a:cs typeface="Calibri" pitchFamily="34" charset="-120"/>
+              </a:rPr>
+              <a:t>DA COMPRENDERE OGGI</a:t>
+            </a:r>
+            <a:pPr indent="0" marL="0">
+              <a:buNone/>
+            </a:pPr>
+            <a:r>
+              <a:rPr lang="en-US" sz="1100" dirty="0">
+                <a:solidFill>
+                  <a:srgbClr val="075985"/>
+                </a:solidFill>
+                <a:latin typeface="Calibri" pitchFamily="34" charset="0"/>
+                <a:ea typeface="Calibri" pitchFamily="34" charset="-122"/>
+                <a:cs typeface="Calibri" pitchFamily="34" charset="-120"/>
+              </a:rPr>
+              <a:t> · il frame buffer</a:t>
+            </a:r>
+            <a:endParaRPr lang="en-US" sz="1100" dirty="0"/>
+          </a:p>
+        </p:txBody>
+      </p:sp>
+      <p:sp>
+        <p:nvSpPr>
           <p:cNvPr id="25" name="Slide Number Placeholder 0"/>
           <p:cNvSpPr>
             <a:spLocks noGrp="1"/>
@@ -11610,6 +12413,285 @@
       </p:sp>
       <p:sp>
         <p:nvSpPr>
+          <p:cNvPr id="15" name="Shape 13"/>
+          <p:cNvSpPr/>
+          <p:nvPr/>
+        </p:nvSpPr>
+        <p:spPr>
+          <a:xfrm>
+            <a:off x="7809941" y="91440"/>
+            <a:ext cx="3833114" cy="274320"/>
+          </a:xfrm>
+          <a:prstGeom prst="rect">
+            <a:avLst/>
+          </a:prstGeom>
+          <a:solidFill>
+            <a:srgbClr val="FEF3C7"/>
+          </a:solidFill>
+          <a:ln w="12700">
+            <a:solidFill>
+              <a:srgbClr val="B45309"/>
+            </a:solidFill>
+            <a:prstDash val="solid"/>
+          </a:ln>
+        </p:spPr>
+      </p:sp>
+      <p:sp>
+        <p:nvSpPr>
+          <p:cNvPr id="16" name="Shape 14"/>
+          <p:cNvSpPr/>
+          <p:nvPr/>
+        </p:nvSpPr>
+        <p:spPr>
+          <a:xfrm>
+            <a:off x="7809941" y="91440"/>
+            <a:ext cx="27432" cy="274320"/>
+          </a:xfrm>
+          <a:prstGeom prst="rect">
+            <a:avLst/>
+          </a:prstGeom>
+          <a:solidFill>
+            <a:srgbClr val="B45309"/>
+          </a:solidFill>
+          <a:ln w="12700">
+            <a:solidFill>
+              <a:srgbClr val="B45309"/>
+            </a:solidFill>
+            <a:prstDash val="solid"/>
+          </a:ln>
+        </p:spPr>
+      </p:sp>
+      <p:sp>
+        <p:nvSpPr>
+          <p:cNvPr id="17" name="Shape 15"/>
+          <p:cNvSpPr/>
+          <p:nvPr/>
+        </p:nvSpPr>
+        <p:spPr>
+          <a:xfrm>
+            <a:off x="7864805" y="91440"/>
+            <a:ext cx="27432" cy="274320"/>
+          </a:xfrm>
+          <a:prstGeom prst="rect">
+            <a:avLst/>
+          </a:prstGeom>
+          <a:solidFill>
+            <a:srgbClr val="B45309"/>
+          </a:solidFill>
+          <a:ln w="12700">
+            <a:solidFill>
+              <a:srgbClr val="B45309"/>
+            </a:solidFill>
+            <a:prstDash val="solid"/>
+          </a:ln>
+        </p:spPr>
+      </p:sp>
+      <p:pic>
+        <p:nvPicPr>
+          <p:cNvPr id="18" name="Image 0" descr="preencoded.png">    </p:cNvPr>
+          <p:cNvPicPr>
+            <a:picLocks noChangeAspect="1"/>
+          </p:cNvPicPr>
+          <p:nvPr/>
+        </p:nvPicPr>
+        <p:blipFill>
+          <a:blip r:embed="rId1"/>
+          <a:stretch>
+            <a:fillRect/>
+          </a:stretch>
+        </p:blipFill>
+        <p:spPr>
+          <a:xfrm>
+            <a:off x="7937957" y="128016"/>
+            <a:ext cx="201168" cy="201168"/>
+          </a:xfrm>
+          <a:prstGeom prst="rect">
+            <a:avLst/>
+          </a:prstGeom>
+        </p:spPr>
+      </p:pic>
+      <p:sp>
+        <p:nvSpPr>
+          <p:cNvPr id="19" name="Text 16"/>
+          <p:cNvSpPr txBox="1"/>
+          <p:nvPr/>
+        </p:nvSpPr>
+        <p:spPr>
+          <a:xfrm>
+            <a:off x="8193989" y="91440"/>
+            <a:ext cx="3412490" cy="274320"/>
+          </a:xfrm>
+          <a:prstGeom prst="rect">
+            <a:avLst/>
+          </a:prstGeom>
+          <a:noFill/>
+          <a:ln/>
+        </p:spPr>
+        <p:txBody>
+          <a:bodyPr wrap="square" lIns="0" tIns="0" rIns="0" bIns="0" rtlCol="0" anchor="ctr"/>
+          <a:lstStyle/>
+          <a:p>
+            <a:pPr indent="0" marL="0">
+              <a:buNone/>
+            </a:pPr>
+            <a:r>
+              <a:rPr lang="en-US" sz="1100" b="1" dirty="0">
+                <a:solidFill>
+                  <a:srgbClr val="92400E"/>
+                </a:solidFill>
+                <a:latin typeface="Calibri" pitchFamily="34" charset="0"/>
+                <a:ea typeface="Calibri" pitchFamily="34" charset="-122"/>
+                <a:cs typeface="Calibri" pitchFamily="34" charset="-120"/>
+              </a:rPr>
+              <a:t>DA UTILIZZARE OGGI</a:t>
+            </a:r>
+            <a:pPr indent="0" marL="0">
+              <a:buNone/>
+            </a:pPr>
+            <a:r>
+              <a:rPr lang="en-US" sz="1100" dirty="0">
+                <a:solidFill>
+                  <a:srgbClr val="92400E"/>
+                </a:solidFill>
+                <a:latin typeface="Calibri" pitchFamily="34" charset="0"/>
+                <a:ea typeface="Calibri" pitchFamily="34" charset="-122"/>
+                <a:cs typeface="Calibri" pitchFamily="34" charset="-120"/>
+              </a:rPr>
+              <a:t> · il debugger di PRG32-QT</a:t>
+            </a:r>
+            <a:endParaRPr lang="en-US" sz="1100" dirty="0"/>
+          </a:p>
+        </p:txBody>
+      </p:sp>
+      <p:sp>
+        <p:nvSpPr>
+          <p:cNvPr id="20" name="Shape 17"/>
+          <p:cNvSpPr/>
+          <p:nvPr/>
+        </p:nvSpPr>
+        <p:spPr>
+          <a:xfrm>
+            <a:off x="3780485" y="91440"/>
+            <a:ext cx="3919728" cy="274320"/>
+          </a:xfrm>
+          <a:prstGeom prst="rect">
+            <a:avLst/>
+          </a:prstGeom>
+          <a:solidFill>
+            <a:srgbClr val="E0F2FE"/>
+          </a:solidFill>
+          <a:ln w="12700">
+            <a:solidFill>
+              <a:srgbClr val="0369A1"/>
+            </a:solidFill>
+            <a:prstDash val="solid"/>
+          </a:ln>
+        </p:spPr>
+      </p:sp>
+      <p:sp>
+        <p:nvSpPr>
+          <p:cNvPr id="21" name="Shape 18"/>
+          <p:cNvSpPr/>
+          <p:nvPr/>
+        </p:nvSpPr>
+        <p:spPr>
+          <a:xfrm>
+            <a:off x="3780485" y="91440"/>
+            <a:ext cx="73152" cy="274320"/>
+          </a:xfrm>
+          <a:prstGeom prst="rect">
+            <a:avLst/>
+          </a:prstGeom>
+          <a:solidFill>
+            <a:srgbClr val="0369A1"/>
+          </a:solidFill>
+          <a:ln w="12700">
+            <a:solidFill>
+              <a:srgbClr val="0369A1"/>
+            </a:solidFill>
+            <a:prstDash val="solid"/>
+          </a:ln>
+        </p:spPr>
+      </p:sp>
+      <p:pic>
+        <p:nvPicPr>
+          <p:cNvPr id="22" name="Image 1" descr="preencoded.png">    </p:cNvPr>
+          <p:cNvPicPr>
+            <a:picLocks noChangeAspect="1"/>
+          </p:cNvPicPr>
+          <p:nvPr/>
+        </p:nvPicPr>
+        <p:blipFill>
+          <a:blip r:embed="rId2"/>
+          <a:stretch>
+            <a:fillRect/>
+          </a:stretch>
+        </p:blipFill>
+        <p:spPr>
+          <a:xfrm>
+            <a:off x="3908501" y="128016"/>
+            <a:ext cx="201168" cy="201168"/>
+          </a:xfrm>
+          <a:prstGeom prst="rect">
+            <a:avLst/>
+          </a:prstGeom>
+        </p:spPr>
+      </p:pic>
+      <p:sp>
+        <p:nvSpPr>
+          <p:cNvPr id="23" name="Text 19"/>
+          <p:cNvSpPr txBox="1"/>
+          <p:nvPr/>
+        </p:nvSpPr>
+        <p:spPr>
+          <a:xfrm>
+            <a:off x="4164533" y="91440"/>
+            <a:ext cx="3499104" cy="274320"/>
+          </a:xfrm>
+          <a:prstGeom prst="rect">
+            <a:avLst/>
+          </a:prstGeom>
+          <a:noFill/>
+          <a:ln/>
+        </p:spPr>
+        <p:txBody>
+          <a:bodyPr wrap="square" lIns="0" tIns="0" rIns="0" bIns="0" rtlCol="0" anchor="ctr"/>
+          <a:lstStyle/>
+          <a:p>
+            <a:pPr indent="0" marL="0">
+              <a:buNone/>
+            </a:pPr>
+            <a:r>
+              <a:rPr lang="en-US" sz="1100" b="1" dirty="0">
+                <a:solidFill>
+                  <a:srgbClr val="075985"/>
+                </a:solidFill>
+                <a:latin typeface="Calibri" pitchFamily="34" charset="0"/>
+                <a:ea typeface="Calibri" pitchFamily="34" charset="-122"/>
+                <a:cs typeface="Calibri" pitchFamily="34" charset="-120"/>
+              </a:rPr>
+              <a:t>DA COMPRENDERE OGGI</a:t>
+            </a:r>
+            <a:pPr indent="0" marL="0">
+              <a:buNone/>
+            </a:pPr>
+            <a:r>
+              <a:rPr lang="en-US" sz="1100" dirty="0">
+                <a:solidFill>
+                  <a:srgbClr val="075985"/>
+                </a:solidFill>
+                <a:latin typeface="Calibri" pitchFamily="34" charset="0"/>
+                <a:ea typeface="Calibri" pitchFamily="34" charset="-122"/>
+                <a:cs typeface="Calibri" pitchFamily="34" charset="-120"/>
+              </a:rPr>
+              <a:t> · il ciclo del processore</a:t>
+            </a:r>
+            <a:endParaRPr lang="en-US" sz="1100" dirty="0"/>
+          </a:p>
+        </p:txBody>
+      </p:sp>
+      <p:sp>
+        <p:nvSpPr>
           <p:cNvPr id="25" name="Slide Number Placeholder 0"/>
           <p:cNvSpPr>
             <a:spLocks noGrp="1"/>
@@ -12117,6 +13199,285 @@
               <a:t>PRG32-QT: listato, registri, memoria</a:t>
             </a:r>
             <a:endParaRPr lang="en-US" sz="1200" dirty="0"/>
+          </a:p>
+        </p:txBody>
+      </p:sp>
+      <p:sp>
+        <p:nvSpPr>
+          <p:cNvPr id="15" name="Shape 12"/>
+          <p:cNvSpPr/>
+          <p:nvPr/>
+        </p:nvSpPr>
+        <p:spPr>
+          <a:xfrm>
+            <a:off x="7809941" y="91440"/>
+            <a:ext cx="3833114" cy="274320"/>
+          </a:xfrm>
+          <a:prstGeom prst="rect">
+            <a:avLst/>
+          </a:prstGeom>
+          <a:solidFill>
+            <a:srgbClr val="FEF3C7"/>
+          </a:solidFill>
+          <a:ln w="12700">
+            <a:solidFill>
+              <a:srgbClr val="B45309"/>
+            </a:solidFill>
+            <a:prstDash val="solid"/>
+          </a:ln>
+        </p:spPr>
+      </p:sp>
+      <p:sp>
+        <p:nvSpPr>
+          <p:cNvPr id="16" name="Shape 13"/>
+          <p:cNvSpPr/>
+          <p:nvPr/>
+        </p:nvSpPr>
+        <p:spPr>
+          <a:xfrm>
+            <a:off x="7809941" y="91440"/>
+            <a:ext cx="27432" cy="274320"/>
+          </a:xfrm>
+          <a:prstGeom prst="rect">
+            <a:avLst/>
+          </a:prstGeom>
+          <a:solidFill>
+            <a:srgbClr val="B45309"/>
+          </a:solidFill>
+          <a:ln w="12700">
+            <a:solidFill>
+              <a:srgbClr val="B45309"/>
+            </a:solidFill>
+            <a:prstDash val="solid"/>
+          </a:ln>
+        </p:spPr>
+      </p:sp>
+      <p:sp>
+        <p:nvSpPr>
+          <p:cNvPr id="17" name="Shape 14"/>
+          <p:cNvSpPr/>
+          <p:nvPr/>
+        </p:nvSpPr>
+        <p:spPr>
+          <a:xfrm>
+            <a:off x="7864805" y="91440"/>
+            <a:ext cx="27432" cy="274320"/>
+          </a:xfrm>
+          <a:prstGeom prst="rect">
+            <a:avLst/>
+          </a:prstGeom>
+          <a:solidFill>
+            <a:srgbClr val="B45309"/>
+          </a:solidFill>
+          <a:ln w="12700">
+            <a:solidFill>
+              <a:srgbClr val="B45309"/>
+            </a:solidFill>
+            <a:prstDash val="solid"/>
+          </a:ln>
+        </p:spPr>
+      </p:sp>
+      <p:pic>
+        <p:nvPicPr>
+          <p:cNvPr id="18" name="Image 1" descr="preencoded.png">    </p:cNvPr>
+          <p:cNvPicPr>
+            <a:picLocks noChangeAspect="1"/>
+          </p:cNvPicPr>
+          <p:nvPr/>
+        </p:nvPicPr>
+        <p:blipFill>
+          <a:blip r:embed="rId2"/>
+          <a:stretch>
+            <a:fillRect/>
+          </a:stretch>
+        </p:blipFill>
+        <p:spPr>
+          <a:xfrm>
+            <a:off x="7937957" y="128016"/>
+            <a:ext cx="201168" cy="201168"/>
+          </a:xfrm>
+          <a:prstGeom prst="rect">
+            <a:avLst/>
+          </a:prstGeom>
+        </p:spPr>
+      </p:pic>
+      <p:sp>
+        <p:nvSpPr>
+          <p:cNvPr id="19" name="Text 15"/>
+          <p:cNvSpPr txBox="1"/>
+          <p:nvPr/>
+        </p:nvSpPr>
+        <p:spPr>
+          <a:xfrm>
+            <a:off x="8193989" y="91440"/>
+            <a:ext cx="3412490" cy="274320"/>
+          </a:xfrm>
+          <a:prstGeom prst="rect">
+            <a:avLst/>
+          </a:prstGeom>
+          <a:noFill/>
+          <a:ln/>
+        </p:spPr>
+        <p:txBody>
+          <a:bodyPr wrap="square" lIns="0" tIns="0" rIns="0" bIns="0" rtlCol="0" anchor="ctr"/>
+          <a:lstStyle/>
+          <a:p>
+            <a:pPr indent="0" marL="0">
+              <a:buNone/>
+            </a:pPr>
+            <a:r>
+              <a:rPr lang="en-US" sz="1100" b="1" dirty="0">
+                <a:solidFill>
+                  <a:srgbClr val="92400E"/>
+                </a:solidFill>
+                <a:latin typeface="Calibri" pitchFamily="34" charset="0"/>
+                <a:ea typeface="Calibri" pitchFamily="34" charset="-122"/>
+                <a:cs typeface="Calibri" pitchFamily="34" charset="-120"/>
+              </a:rPr>
+              <a:t>DA UTILIZZARE OGGI</a:t>
+            </a:r>
+            <a:pPr indent="0" marL="0">
+              <a:buNone/>
+            </a:pPr>
+            <a:r>
+              <a:rPr lang="en-US" sz="1100" dirty="0">
+                <a:solidFill>
+                  <a:srgbClr val="92400E"/>
+                </a:solidFill>
+                <a:latin typeface="Calibri" pitchFamily="34" charset="0"/>
+                <a:ea typeface="Calibri" pitchFamily="34" charset="-122"/>
+                <a:cs typeface="Calibri" pitchFamily="34" charset="-120"/>
+              </a:rPr>
+              <a:t> · il debugger di PRG32-QT</a:t>
+            </a:r>
+            <a:endParaRPr lang="en-US" sz="1100" dirty="0"/>
+          </a:p>
+        </p:txBody>
+      </p:sp>
+      <p:sp>
+        <p:nvSpPr>
+          <p:cNvPr id="20" name="Shape 16"/>
+          <p:cNvSpPr/>
+          <p:nvPr/>
+        </p:nvSpPr>
+        <p:spPr>
+          <a:xfrm>
+            <a:off x="3583508" y="91440"/>
+            <a:ext cx="4116705" cy="274320"/>
+          </a:xfrm>
+          <a:prstGeom prst="rect">
+            <a:avLst/>
+          </a:prstGeom>
+          <a:solidFill>
+            <a:srgbClr val="E0F2FE"/>
+          </a:solidFill>
+          <a:ln w="12700">
+            <a:solidFill>
+              <a:srgbClr val="0369A1"/>
+            </a:solidFill>
+            <a:prstDash val="solid"/>
+          </a:ln>
+        </p:spPr>
+      </p:sp>
+      <p:sp>
+        <p:nvSpPr>
+          <p:cNvPr id="21" name="Shape 17"/>
+          <p:cNvSpPr/>
+          <p:nvPr/>
+        </p:nvSpPr>
+        <p:spPr>
+          <a:xfrm>
+            <a:off x="3583508" y="91440"/>
+            <a:ext cx="73152" cy="274320"/>
+          </a:xfrm>
+          <a:prstGeom prst="rect">
+            <a:avLst/>
+          </a:prstGeom>
+          <a:solidFill>
+            <a:srgbClr val="0369A1"/>
+          </a:solidFill>
+          <a:ln w="12700">
+            <a:solidFill>
+              <a:srgbClr val="0369A1"/>
+            </a:solidFill>
+            <a:prstDash val="solid"/>
+          </a:ln>
+        </p:spPr>
+      </p:sp>
+      <p:pic>
+        <p:nvPicPr>
+          <p:cNvPr id="22" name="Image 2" descr="preencoded.png">    </p:cNvPr>
+          <p:cNvPicPr>
+            <a:picLocks noChangeAspect="1"/>
+          </p:cNvPicPr>
+          <p:nvPr/>
+        </p:nvPicPr>
+        <p:blipFill>
+          <a:blip r:embed="rId3"/>
+          <a:stretch>
+            <a:fillRect/>
+          </a:stretch>
+        </p:blipFill>
+        <p:spPr>
+          <a:xfrm>
+            <a:off x="3711524" y="128016"/>
+            <a:ext cx="201168" cy="201168"/>
+          </a:xfrm>
+          <a:prstGeom prst="rect">
+            <a:avLst/>
+          </a:prstGeom>
+        </p:spPr>
+      </p:pic>
+      <p:sp>
+        <p:nvSpPr>
+          <p:cNvPr id="23" name="Text 18"/>
+          <p:cNvSpPr txBox="1"/>
+          <p:nvPr/>
+        </p:nvSpPr>
+        <p:spPr>
+          <a:xfrm>
+            <a:off x="3967556" y="91440"/>
+            <a:ext cx="3696081" cy="274320"/>
+          </a:xfrm>
+          <a:prstGeom prst="rect">
+            <a:avLst/>
+          </a:prstGeom>
+          <a:noFill/>
+          <a:ln/>
+        </p:spPr>
+        <p:txBody>
+          <a:bodyPr wrap="square" lIns="0" tIns="0" rIns="0" bIns="0" rtlCol="0" anchor="ctr"/>
+          <a:lstStyle/>
+          <a:p>
+            <a:pPr indent="0" marL="0">
+              <a:buNone/>
+            </a:pPr>
+            <a:r>
+              <a:rPr lang="en-US" sz="1100" b="1" dirty="0">
+                <a:solidFill>
+                  <a:srgbClr val="075985"/>
+                </a:solidFill>
+                <a:latin typeface="Calibri" pitchFamily="34" charset="0"/>
+                <a:ea typeface="Calibri" pitchFamily="34" charset="-122"/>
+                <a:cs typeface="Calibri" pitchFamily="34" charset="-120"/>
+              </a:rPr>
+              <a:t>DA COMPRENDERE OGGI</a:t>
+            </a:r>
+            <a:pPr indent="0" marL="0">
+              <a:buNone/>
+            </a:pPr>
+            <a:r>
+              <a:rPr lang="en-US" sz="1100" dirty="0">
+                <a:solidFill>
+                  <a:srgbClr val="075985"/>
+                </a:solidFill>
+                <a:latin typeface="Calibri" pitchFamily="34" charset="0"/>
+                <a:ea typeface="Calibri" pitchFamily="34" charset="-122"/>
+                <a:cs typeface="Calibri" pitchFamily="34" charset="-120"/>
+              </a:rPr>
+              <a:t> · la convenzione di chiamata</a:t>
+            </a:r>
+            <a:endParaRPr lang="en-US" sz="1100" dirty="0"/>
           </a:p>
         </p:txBody>
       </p:sp>

--- a/it/slides/22-Architettura_dei_Calcolatori-Verm1_Parte_4.pptx
+++ b/it/slides/22-Architettura_dei_Calcolatori-Verm1_Parte_4.pptx
@@ -118,7 +118,7 @@
   <p:extLst>
     <p:ext uri="{521415D9-36F7-43E2-AB2F-B90AF26B5E84}">
       <p14:sectionLst xmlns:p14="http://schemas.microsoft.com/office/powerpoint/2010/main">
-        <p14:section name="Apertura" id="{090a2e2d-ae6d-e02a-6a6c-4cd43078ef88}">
+        <p14:section name="Apertura" id="{21ca765d-8008-5219-b080-b69c7ed387cf}">
           <p14:sldIdLst>
             <p14:sldId id="256"/>
             <p14:sldId id="257"/>
@@ -126,22 +126,22 @@
             <p14:sldId id="259"/>
           </p14:sldIdLst>
         </p14:section>
-        <p14:section name="Passo 1: il punteggio in cifre" id="{a8ea7409-ed24-00ba-8b0f-a53ee3c29e98}">
+        <p14:section name="Passo 1: il punteggio in cifre" id="{095ecc19-0916-f461-3f4c-8283f93b7129}">
           <p14:sldIdLst>
             <p14:sldId id="260"/>
           </p14:sldIdLst>
         </p14:section>
-        <p14:section name="Passo 2: i livelli" id="{43ff89d7-3876-e1be-0104-f5f6eb8b953d}">
+        <p14:section name="Passo 2: i livelli" id="{b5f757e5-3a60-3334-30e2-4f2d4ab05677}">
           <p14:sldIdLst>
             <p14:sldId id="261"/>
           </p14:sldIdLst>
         </p14:section>
-        <p14:section name="Passo 4: disegnare solo ciò che è cambiato" id="{c9ec64bc-7676-21d1-a18f-626a879aaff3}">
+        <p14:section name="Passo 4: disegnare solo ciò che è cambiato" id="{2fee862d-209a-ebcb-449a-5995d7783d3e}">
           <p14:sldIdLst>
             <p14:sldId id="262"/>
           </p14:sldIdLst>
         </p14:section>
-        <p14:section name="Passo 5: misurare" id="{5c9a41f2-5298-a57b-9794-bad8f1c9884d}">
+        <p14:section name="Passo 5: misurare" id="{c4c94f19-8e8a-b6ef-058a-d590ac5893a6}">
           <p14:sldIdLst>
             <p14:sldId id="263"/>
             <p14:sldId id="264"/>
@@ -1005,7 +1005,7 @@
           <a:p>
             <a:r>
               <a:rPr lang="en-US" dirty="0"/>
-              <a:t>Le idee dell'ultimo blocco di lezioni, e dove compaiono oggi. La convenzione di chiamata della Lezione 18 diventa piccole funzioni con un contratto, alcune delle quali foglie. L'estensione M dà quoziente e resto per le cifre. Il ciclo del processore ricorda che ogni istruzione costa tempo, quindi si misura. Lo schermo come memoria, dalla Lezione 20, suggerisce di disegnare solo ciò che è cambiato. E dalla Lezione 21: i dispositivi sono del runtime, a cui chiediamo una nota di una certa durata.
+              <a:t>Le idee dell'ultimo blocco di lezioni, e dove compaiono oggi. La convenzione di chiamata della Lezione 18 diventa piccole funzioni con un contratto, alcune delle quali foglie. L'estensione M, incontrata nelle Lezioni 05 e 06, dà quoziente e resto per le cifre. Il ciclo del processore ricorda che ogni istruzione costa tempo, quindi si misura. Lo schermo come memoria, dalla Lezione 20, suggerisce di disegnare solo ciò che è cambiato. E dalla Lezione 21: i dispositivi sono del runtime, a cui chiediamo una nota di una certa durata.
 Per il docente: Torna anche la Lezione 04: una cifra diventa un carattere sommando 48, il codice ASCII di '0'.</a:t>
             </a:r>
             <a:endParaRPr lang="en-US" dirty="0"/>
@@ -7092,7 +7092,7 @@
                           <a:ea typeface="Calibri" pitchFamily="34" charset="-122"/>
                           <a:cs typeface="Calibri" pitchFamily="34" charset="-120"/>
                         </a:rPr>
-                        <a:t>Lezione 18</a:t>
+                        <a:t>Lezioni 05, 06</a:t>
                       </a:r>
                       <a:endParaRPr lang="en-US" sz="2100" dirty="0">
                         <a:latin typeface="Calibri" charset="0"/>
@@ -7160,7 +7160,7 @@
                           <a:ea typeface="Calibri" pitchFamily="34" charset="-122"/>
                           <a:cs typeface="Calibri" pitchFamily="34" charset="-120"/>
                         </a:rPr>
-                        <a:t>l'estensione M: divu e remu, quoziente e resto</a:t>
+                        <a:t>divu e remu (senza segno), la M di RV32IMAC: quoziente e resto</a:t>
                       </a:r>
                       <a:endParaRPr lang="en-US" sz="2100" dirty="0">
                         <a:latin typeface="Calibri" charset="0"/>

--- a/it/slides/22-Architettura_dei_Calcolatori-Verm1_Parte_4.pptx
+++ b/it/slides/22-Architettura_dei_Calcolatori-Verm1_Parte_4.pptx
@@ -118,7 +118,7 @@
   <p:extLst>
     <p:ext uri="{521415D9-36F7-43E2-AB2F-B90AF26B5E84}">
       <p14:sectionLst xmlns:p14="http://schemas.microsoft.com/office/powerpoint/2010/main">
-        <p14:section name="Apertura" id="{21ca765d-8008-5219-b080-b69c7ed387cf}">
+        <p14:section name="Apertura" id="{d66e9035-cb7e-cce2-3ab7-ebcd9c266cad}">
           <p14:sldIdLst>
             <p14:sldId id="256"/>
             <p14:sldId id="257"/>
@@ -126,22 +126,22 @@
             <p14:sldId id="259"/>
           </p14:sldIdLst>
         </p14:section>
-        <p14:section name="Passo 1: il punteggio in cifre" id="{095ecc19-0916-f461-3f4c-8283f93b7129}">
+        <p14:section name="Passo 1: il punteggio in cifre" id="{d46450a2-d47c-9d06-355a-ab58340ed046}">
           <p14:sldIdLst>
             <p14:sldId id="260"/>
           </p14:sldIdLst>
         </p14:section>
-        <p14:section name="Passo 2: i livelli" id="{b5f757e5-3a60-3334-30e2-4f2d4ab05677}">
+        <p14:section name="Passo 2: i livelli" id="{e4eb8b72-cc1f-01cd-968e-8b130a98cab5}">
           <p14:sldIdLst>
             <p14:sldId id="261"/>
           </p14:sldIdLst>
         </p14:section>
-        <p14:section name="Passo 4: disegnare solo ciò che è cambiato" id="{2fee862d-209a-ebcb-449a-5995d7783d3e}">
+        <p14:section name="Passo 4: disegnare solo ciò che è cambiato" id="{1c7f9637-1e41-4df7-4b58-cd2e7c2b2969}">
           <p14:sldIdLst>
             <p14:sldId id="262"/>
           </p14:sldIdLst>
         </p14:section>
-        <p14:section name="Passo 5: misurare" id="{c4c94f19-8e8a-b6ef-058a-d590ac5893a6}">
+        <p14:section name="Passo 5: misurare" id="{83d43bf2-2405-accb-200d-b2e0b8c7a2b8}">
           <p14:sldIdLst>
             <p14:sldId id="263"/>
             <p14:sldId id="264"/>
@@ -554,7 +554,7 @@
           <a:p>
             <a:r>
               <a:rPr lang="en-US" dirty="0"/>
-              <a:t>Il quarto e ultimo tutorial completa Verm1. Nella Parte 3 il gioco era completo nelle regole; oggi diventa completo come programma. Il punteggio è scritto in cifre, il verme accelera, ci sono due suoni, e lo schermo viene ridisegnato solo dove cambia. La frase di Knuth in copertina spiega l'ordine del lavoro: prima il gioco è stato fatto funzionare, e solo adesso, con una misura in mano, lo rendiamo veloce.
+              <a:t>Il quarto e ultimo tutorial completa Verm1. Alla fine della Parte 3 il gioco era completo nelle sue regole; oggi diventa completo come programma. Il punteggio si scrive in cifre decimali, il verme accelera, ci sono due suoni, e lo schermo si ridisegna solo dove cambia. La frase di Knuth in copertina giustifica l'ordine del lavoro: prima si è reso il gioco corretto, e solo ora, con una misura in mano, lo si rende veloce. Ottimizzare senza misurare è tirare a indovinare, e il tutorial si chiude misurando l'effetto delle proprie modifiche.
 Stato di apprendimento: DA COMPRENDERE OGGI, alla fine di questa lezione lo spiegate, lo seguite passo passo e lo applicate da soli; DA UTILIZZARE OGGI, oggi seguite e usate la ricetta; come funziona dentro si spiega più avanti, o non fa parte del corso; DA COMPRENDERE PIÙ AVANTI, riconoscete il nome e lo scopo; lo spiega una lezione successiva. Una slide senza etichetta è contesto: una storia, un esempio, una domanda, un esercizio.
 Stato di apprendimento di questa lezione. DA COMPRENDERE OGGI: quoziente e resto; caratteri e stringhe; la virgola fissa; la convenzione di chiamata; gli array in memoria; macchine a stati finiti; il frame buffer; il ciclo del processore. DA UTILIZZARE OGGI: gli strumenti di PRG32, il debugger di PRG32-QT (si usa, non si studia, in questo corso). DA COMPRENDERE PIÙ AVANTI: niente. Una slide senza etichetta è contesto: una storia, un esempio, una domanda, un esercizio.
 Per il docente: Quarto tutorial del progetto. Usa le Lezioni da 18 a 21: i registri per convenzione, lo stack, moltiplicazione e divisione (18), il ciclo del processore e il costo di un'istruzione (19), il frame buffer e il costo del disegno (20), ingresso, suono e il runtime come padrone dei dispositivi (21). Il file di riferimento è verm1/verm1_part4.S. La frase di Knuth è il motto giusto: il gioco è stato fatto funzionare nella Parte 3, e solo adesso, con una misura in mano, lo rendiamo veloce.</a:t>
@@ -645,8 +645,8 @@
           <a:p>
             <a:r>
               <a:rPr lang="en-US" dirty="0"/>
-              <a:t>Convertite 205 in tre cifre, poi ogni cifra nel suo codice ASCII sommando 0x30. Attenzione all'ordine: lo scostamento 0 contiene le centinaia.
-Un passo ogni quattro frame significa una velocità di 256 diviso 4. Mettete quel valore nella formula della velocità e ricavate il punteggio.
+              <a:t>Per la prima domanda 205 si converte in tre cifre, e ogni cifra nel suo codice ASCII sommando 0x30. L'ordine conta: lo spiazzamento 0 contiene le centinaia.
+Per la seconda: un passo ogni quattro frame corrisponde a una velocità di 256 / 4. Quel valore si sostituisce nella formula della velocità, e l'equazione si risolve rispetto al punteggio.
 Per il docente: 1. Risposta: B. I caratteri '2', '0', '5': 0x32, 0x30, 0x35. Le unità vanno allo scostamento 2.
 2. Risposta: B. Un passo ogni 4 frame è 64/256: 32 + 4 x score = 64, quindi score = 8.</a:t>
             </a:r>
@@ -736,8 +736,8 @@
           <a:p>
             <a:r>
               <a:rPr lang="en-US" dirty="0"/>
-              <a:t>Contate le istruzioni del percorso più breve di verm1_draw, ricordando che la è una pseudo-istruzione e si espande in due.
-Chiedetevi a che cosa serve uno stack frame: salvare ra quando c'è un'altra chiamata, e salvare i registri da conservare. A to_decimal serve l'una o l'altra cosa?
+              <a:t>Per la prima domanda si contano le istruzioni sul percorso più breve attraverso verm1_draw, ricordando che la è una pseudo-istruzione che si espande in due.
+Per la seconda ci si chiede a che cosa serva uno stack frame: a salvare ra quando si fa un'ulteriore chiamata, e a salvare i registri salvati dal chiamato che la funzione usa. La domanda è se to_decimal abbia bisogno dell'una o dell'altra cosa.
 Per il docente: 1. Risposta: B. la sono due istruzioni, auipc e addi; poi lw, beqz e ret.
 2. Risposta: B. Una funzione foglia che tocca solo registri caller-saved non ha nulla da salvare.</a:t>
             </a:r>
@@ -827,7 +827,7 @@
           <a:p>
             <a:r>
               <a:rPr lang="en-US" dirty="0"/>
-              <a:t>Verm1 è finito: circa seicento righe di assembly RISC-V, tutte vostre. È cominciato come tre funzioni che ritornano ed è cresciuto un passo eseguibile alla volta, e dentro c'è ogni parte del corso: numeri, logica, stato, memoria, chiamate, pixel, dispositivi. Manca una cosa: un programma che solo il suo autore può eseguire è finito a metà. La prossima lezione gli dà un nome, un'icona e i crediti, e lo pubblica.
+              <a:t>Verm1 è finito: circa seicento righe di assembly RISC-V, ognuna scritta dallo studente. È nato come tre funzioni che si limitavano a ritornare ed è cresciuto un passo eseguibile alla volta, e ogni parte del corso vi è presente: numeri, logica, stato, memoria, chiamate di procedura, pixel e dispositivi. Resta una cosa: un programma che solo il suo autore può eseguire è finito a metà. La prossima lezione gli dà un nome, un'icona e dei crediti, e lo pubblica.
 Stato di apprendimento, riepilogo. DA COMPRENDERE OGGI: quoziente e resto; caratteri e stringhe; la virgola fissa; la convenzione di chiamata; gli array in memoria; macchine a stati finiti; il frame buffer; il ciclo del processore. DA UTILIZZARE OGGI: gli strumenti di PRG32, il debugger di PRG32-QT (si usa, non si studia, in questo corso). DA COMPRENDERE PIÙ AVANTI: niente. Una slide senza etichetta è contesto: una storia, un esempio, una domanda, un esercizio.
 Per il docente: Chiedete agli studenti di portare la propria variante alla Lezione 23: il bundle che preparano deve essere del loro gioco, non del riferimento.</a:t>
             </a:r>
@@ -917,7 +917,7 @@
           <a:p>
             <a:r>
               <a:rPr lang="en-US" dirty="0"/>
-              <a:t>Cinque risultati. Il punteggio e il punteggio migliore in cifre, convertiti da una divisione per dieci scritta da voi. Un verme che va più veloce al crescere del punteggio, fino a un limite. Due suoni, uno per un pasto e uno per la fine. Una draw che tocca una manciata di celle per passo invece dell'intero schermo. E un gioco finito, pronto per essere confezionato e pubblicato nella prossima lezione.</a:t>
+              <a:t>Cinque risultati. Il punteggio e il punteggio migliore mostrati in cifre, convertiti da una divisione per dieci scritta dallo studente. Un verme che accelera al crescere del punteggio, fino a un limite. Due suoni, uno per un pasto e uno per la fine della partita. Una funzione draw che tocca una manciata di celle per passo invece dell'intero schermo. E un gioco finito, pronto per essere impacchettato e pubblicato nella prossima lezione.</a:t>
             </a:r>
             <a:endParaRPr lang="en-US" dirty="0"/>
           </a:p>
@@ -1005,7 +1005,7 @@
           <a:p>
             <a:r>
               <a:rPr lang="en-US" dirty="0"/>
-              <a:t>Le idee dell'ultimo blocco di lezioni, e dove compaiono oggi. La convenzione di chiamata della Lezione 18 diventa piccole funzioni con un contratto, alcune delle quali foglie. L'estensione M, incontrata nelle Lezioni 05 e 06, dà quoziente e resto per le cifre. Il ciclo del processore ricorda che ogni istruzione costa tempo, quindi si misura. Lo schermo come memoria, dalla Lezione 20, suggerisce di disegnare solo ciò che è cambiato. E dalla Lezione 21: i dispositivi sono del runtime, a cui chiediamo una nota di una certa durata.
+              <a:t>Le idee dell'ultimo blocco di lezioni, e dove compaiono oggi. La convenzione di chiamata della Lezione 18 diventa piccole funzioni con contratti espliciti, alcune delle quali foglie. L'estensione M, le cui divisione e resto senza segno divu e remu si sono incontrati nelle Lezioni 05 e 06, fornisce le cifre. Il ciclo del processore della Lezione 19 ricorda che ogni istruzione costa tempo, da cui la misura. Lo schermo come memoria, dalla Lezione 20, suggerisce di ridisegnare solo ciò che è cambiato. E dalla Lezione 21: i dispositivi appartengono al runtime, a cui si chiede una nota di una data durata.
 Per il docente: Torna anche la Lezione 04: una cifra diventa un carattere sommando 48, il codice ASCII di '0'.</a:t>
             </a:r>
             <a:endParaRPr lang="en-US" dirty="0"/>
@@ -1094,7 +1094,7 @@
           <a:p>
             <a:r>
               <a:rPr lang="en-US" dirty="0"/>
-              <a:t>Dove state andando: la schermata del titolo con il punteggio migliore, il gioco con il punteggio in cifre, il game over. Partite da una Parte 3 che gira; se la vostra non gira, copiate il file di riferimento. Oggi ci sono quattro passi di codice, e il programma gira dopo ciascuno.
+              <a:t>La meta: la schermata del titolo con il punteggio migliore, il gioco con il punteggio in cifre, e la schermata di fine partita. La sessione parte da una Parte 3 funzionante; uno studente il cui file non gira copia il file di riferimento. Oggi ci sono quattro passi di codice, e il programma si esegue dopo ciascuno.
 Per il docente: Schermate prodotte da tools/tests/verm1_check.py con un giocatore programmato.</a:t>
             </a:r>
             <a:endParaRPr lang="en-US" dirty="0"/>
@@ -1183,7 +1183,7 @@
           <a:p>
             <a:r>
               <a:rPr lang="en-US" dirty="0"/>
-              <a:t>La variabile score contiene un numero binario: 137 è il byte 0x89. Lo schermo vuole tre caratteri, i byte 0x31, 0x33 e 0x37. La conversione è quella che avete fatto a mano nella Lezione 05: si divide per dieci, e il resto è una cifra; si ripete sul quoziente. Le cifre escono da destra, prima le unità, quindi si memorizzano dall'ultimo carattere al primo. Una cifra diventa un carattere sommando 48, il codice ASCII del carattere zero.
+              <a:t>La variabile score contiene un numero binario: 137 è il byte 0x89. Lo schermo richiede tre caratteri, i byte 0x31, 0x33 e 0x37. La conversione è la divisione ripetuta della Lezione 05: dividendo per dieci, il resto è una cifra, e il procedimento si ripete sul quoziente. Le cifre escono da destra, prima le unità, quindi si memorizzano dall'ultimo carattere al primo. Una cifra diventa un carattere sommando 48, il codice ASCII del carattere zero, come ha stabilito la Lezione 04. La distinzione tra un numero e la sua rappresentazione, tema dell'intero corso, diventa qui operativa.
 DA COMPRENDERE OGGI: quoziente e resto.
 Per il docente: La conversione della Lezione 05, fatta dal programma invece che a mano. remu dà il resto, divu il quoziente: due istruzioni dell'estensione M.</a:t>
             </a:r>
@@ -1273,7 +1273,7 @@
           <a:p>
             <a:r>
               <a:rPr lang="en-US" dirty="0"/>
-              <a:t>I livelli in numeri. Per ogni punteggio, la velocità, i frame per passo, cioè 256 diviso la velocità, e le celle al secondo a trenta frame al secondo. Da 3,75 celle al secondo all'inizio a 11,25 dai sedici punti in poi. I frame per passo non sono sempre numeri interi, e non è un problema: a 48 i passi arrivano ogni cinque o sei frame, 5,33 in media. È ciò che vi dà la virgola fissa.
+              <a:t>I livelli, quantificati. Per ogni punteggio la tabella dà la velocità, i frame per passo, cioè 256 diviso la velocità, e le celle al secondo a trenta frame al secondo: da 3,75 celle al secondo all'inizio a 11,25 da sedici punti in poi. I frame per passo non sono sempre interi, e non è un problema: a una velocità di 48 i passi avvengono ogni cinque o sei frame, 5,33 in media. Questa gradazione fine è esattamente ciò che la rappresentazione in virgola fissa offre, e nessuna velocità intera potrebbe ottenerla.
 DA COMPRENDERE OGGI: la virgola fissa.
 Per il docente: 256 diviso la velocità dà i frame per passo; la frequenza dei frame per la velocità diviso 256 dà le celle al secondo. Chiedete agli studenti la riga del punteggio 2.</a:t>
             </a:r>
@@ -1363,7 +1363,7 @@
           <a:p>
             <a:r>
               <a:rPr lang="en-US" dirty="0"/>
-              <a:t>Quanto costa un frame della Parte 3? Cancella 64.000 pixel e ridisegna titolo, punteggio, verme e cibo, trenta volte al secondo. Eppure tra due passi sullo schermo non cambia nulla, e un passo cambia pochissimo: la cella lasciata dalla coda, la vecchia testa che diventa corpo, la nuova testa, e a volte il cibo e il punteggio. Quindi si ricorda che cosa è cambiato e si disegna solo quello. Funziona perché il frame buffer è memoria: l'immagine resta lì da sola.
+              <a:t>Quanto costa un frame della Parte 3? Cancella 64.000 pixel e ridisegna titolo, punteggio, verme e cibo, trenta volte al secondo. Eppure tra due passi nulla cambia sullo schermo, e un passo cambia pochissimo: la cella lasciata dalla coda, la vecchia testa che diventa corpo, la nuova testa, e a volte il cibo e il punteggio. La soluzione è registrare ciò che è cambiato e disegnare solo quello. Funziona perché il frame buffer è memoria, in cui l'immagine persiste da sé, la proprietà stabilita nella Lezione 20.
 DA COMPRENDERE OGGI: il frame buffer.
 Per il docente: Lezione 20: lo schermo è un array di pixel che conserva il suo contenuto. Un verme di 200 celle costa 200 rettangoli per frame nella Parte 3 e tre per passo nella Parte 4. È ciò che facevano i vecchi home computer, perché non avevano scelta.</a:t>
             </a:r>
@@ -1453,7 +1453,7 @@
           <a:p>
             <a:r>
               <a:rPr lang="en-US" dirty="0"/>
-              <a:t>Sei azioni. Eseguite il gioco finito in modalità debug e avviate una partita. Leggete la telemetria per dieci secondi. Confrontate con i numeri della Parte 3 annotati all'inizio. Fate crescere il verme fino a venti celle in entrambe le versioni e rileggete: in una il costo cresce con il verme, nell'altra no. Mettete un breakpoint su draw_changes e verificate che si ferma una volta per passo. Annotate i numeri: andranno nella descrizione del vostro gioco.
+              <a:t>Sei azioni. Si esegue il gioco finito in modalità debug e si avvia una partita. Si legge la telemetria per dieci secondi e la si confronta con le cifre della Parte 3 annotate all'inizio della sessione. Si fa crescere il verme fino a venti celle in entrambe le versioni e si legge di nuovo la telemetria: in una versione il costo cresce con la lunghezza del verme, nell'altra no. Un breakpoint su draw_changes conferma che si ferma una volta per passo. Le cifre vanno annotate, perché appartengono alla descrizione del gioco, e costituiscono la prova che l'ottimizzazione valeva la pena.
 DA COMPRENDERE OGGI: il ciclo del processore. DA UTILIZZARE OGGI: il debugger di PRG32-QT (si usa, non si studia, in questo corso).
 Per il docente: La telemetria conta le istruzioni della cartuccia, non quelle del runtime che riempie i rettangoli, quindi il risparmio reale sulla scheda è più grande di quanto mostri il conteggio: lì ogni pixel viaggia anche su SPI verso il display. Non date numeri agli studenti: fateli misurare.</a:t>
             </a:r>
@@ -1543,7 +1543,7 @@
           <a:p>
             <a:r>
               <a:rPr lang="en-US" dirty="0"/>
-              <a:t>Seguite una chiamata con il debugger. Fermatevi sulla chiamata a to_decimal e leggete a0, a1, ra e sp. Un passo: il PC salta dentro la funzione e ra contiene l'indirizzo dell'istruzione dopo la chiamata. Proseguite: cambiano solo i temporanei e sp non si muove mai, perché è una foglia. A ret il PC prende il valore di ra. Poi fate lo stesso con draw_text: sp scende di 16, ra viene memorizzato e poi ripreso.
+              <a:t>Una chiamata di procedura seguita nel debugger. L'esecuzione si ferma sulla chiamata a to_decimal, e si leggono a0, a1, ra e sp. Un passo: il PC salta dentro la funzione e ra contiene l'indirizzo dell'istruzione che segue la chiamata. Proseguendo, cambiano solo i temporanei e sp non si muove mai, perché la funzione è una foglia. A ret il PC prende il valore di ra. La stessa procedura con draw_text mostra il contrasto: sp scende di 16, ra viene memorizzato, ed entrambi vengono ripristinati. La convenzione di chiamata della Lezione 18 si osserva così istruzione per istruzione.
 DA COMPRENDERE OGGI: la convenzione di chiamata. DA UTILIZZARE OGGI: il debugger di PRG32-QT (si usa, non si studia, in questo corso).
 Per il docente: La convenzione di chiamata della Lezione 18, osservata istruzione per istruzione. Nel listato call compare come jal, o come auipc seguita da jalr, e ret come c.jr ra.</a:t>
             </a:r>
@@ -2662,7 +2662,7 @@
                 <a:ea typeface="Calibri" pitchFamily="34" charset="-122"/>
                 <a:cs typeface="Calibri" pitchFamily="34" charset="-120"/>
               </a:rPr>
-              <a:t>22-Architettura_dei_Calcolatori-Verm1_Parte_4-Codice.pptx</a:t>
+              <a:t>22-Architettura_dei_Calcolatori-Verm1_Parte_4-Lab.pptx</a:t>
             </a:r>
             <a:endParaRPr lang="en-US" sz="1300" dirty="0"/>
           </a:p>

--- a/it/slides/22-Architettura_dei_Calcolatori-Verm1_Parte_4.pptx
+++ b/it/slides/22-Architettura_dei_Calcolatori-Verm1_Parte_4.pptx
@@ -118,7 +118,7 @@
   <p:extLst>
     <p:ext uri="{521415D9-36F7-43E2-AB2F-B90AF26B5E84}">
       <p14:sectionLst xmlns:p14="http://schemas.microsoft.com/office/powerpoint/2010/main">
-        <p14:section name="Apertura" id="{d66e9035-cb7e-cce2-3ab7-ebcd9c266cad}">
+        <p14:section name="Apertura" id="{bad19fc9-97d5-4ace-f254-7f0f92192d05}">
           <p14:sldIdLst>
             <p14:sldId id="256"/>
             <p14:sldId id="257"/>
@@ -126,22 +126,22 @@
             <p14:sldId id="259"/>
           </p14:sldIdLst>
         </p14:section>
-        <p14:section name="Passo 1: il punteggio in cifre" id="{d46450a2-d47c-9d06-355a-ab58340ed046}">
+        <p14:section name="Passo 1: il punteggio in cifre" id="{f07cbb08-a6ad-5c92-6837-c45b3d14a081}">
           <p14:sldIdLst>
             <p14:sldId id="260"/>
           </p14:sldIdLst>
         </p14:section>
-        <p14:section name="Passo 2: i livelli" id="{e4eb8b72-cc1f-01cd-968e-8b130a98cab5}">
+        <p14:section name="Passo 2: i livelli" id="{5871489c-0c14-30d0-1b9d-4f6c675fc352}">
           <p14:sldIdLst>
             <p14:sldId id="261"/>
           </p14:sldIdLst>
         </p14:section>
-        <p14:section name="Passo 4: disegnare solo ciò che è cambiato" id="{1c7f9637-1e41-4df7-4b58-cd2e7c2b2969}">
+        <p14:section name="Passo 4: disegnare solo ciò che è cambiato" id="{a03cc483-5b5e-8f3c-dc48-ed9c1d28b629}">
           <p14:sldIdLst>
             <p14:sldId id="262"/>
           </p14:sldIdLst>
         </p14:section>
-        <p14:section name="Passo 5: misurare" id="{83d43bf2-2405-accb-200d-b2e0b8c7a2b8}">
+        <p14:section name="Passo 5: misurare" id="{59a5635e-3a08-8dbe-a1ad-efc3793db125}">
           <p14:sldIdLst>
             <p14:sldId id="263"/>
             <p14:sldId id="264"/>

--- a/it/slides/22-Architettura_dei_Calcolatori-Verm1_Parte_4.pptx
+++ b/it/slides/22-Architettura_dei_Calcolatori-Verm1_Parte_4.pptx
@@ -118,7 +118,7 @@
   <p:extLst>
     <p:ext uri="{521415D9-36F7-43E2-AB2F-B90AF26B5E84}">
       <p14:sectionLst xmlns:p14="http://schemas.microsoft.com/office/powerpoint/2010/main">
-        <p14:section name="Apertura" id="{bad19fc9-97d5-4ace-f254-7f0f92192d05}">
+        <p14:section name="Apertura" id="{f03d8026-cd04-5dbc-f79b-01f88eff38dd}">
           <p14:sldIdLst>
             <p14:sldId id="256"/>
             <p14:sldId id="257"/>
@@ -126,22 +126,22 @@
             <p14:sldId id="259"/>
           </p14:sldIdLst>
         </p14:section>
-        <p14:section name="Passo 1: il punteggio in cifre" id="{f07cbb08-a6ad-5c92-6837-c45b3d14a081}">
+        <p14:section name="Passo 1: il punteggio in cifre" id="{026d7767-f595-d215-42ab-d363d18e3910}">
           <p14:sldIdLst>
             <p14:sldId id="260"/>
           </p14:sldIdLst>
         </p14:section>
-        <p14:section name="Passo 2: i livelli" id="{5871489c-0c14-30d0-1b9d-4f6c675fc352}">
+        <p14:section name="Passo 2: i livelli" id="{e8d2f166-cf45-00d3-853c-e698f1879a37}">
           <p14:sldIdLst>
             <p14:sldId id="261"/>
           </p14:sldIdLst>
         </p14:section>
-        <p14:section name="Passo 4: disegnare solo ciò che è cambiato" id="{a03cc483-5b5e-8f3c-dc48-ed9c1d28b629}">
+        <p14:section name="Passo 4: disegnare solo ciò che è cambiato" id="{3dd5a8c9-e68c-9290-7099-212e31a6f9db}">
           <p14:sldIdLst>
             <p14:sldId id="262"/>
           </p14:sldIdLst>
         </p14:section>
-        <p14:section name="Passo 5: misurare" id="{59a5635e-3a08-8dbe-a1ad-efc3793db125}">
+        <p14:section name="Passo 5: misurare" id="{694b6556-a90c-c697-f59b-3c54402601ce}">
           <p14:sldIdLst>
             <p14:sldId id="263"/>
             <p14:sldId id="264"/>
@@ -557,6 +557,7 @@
               <a:t>Il quarto e ultimo tutorial completa Verm1. Alla fine della Parte 3 il gioco era completo nelle sue regole; oggi diventa completo come programma. Il punteggio si scrive in cifre decimali, il verme accelera, ci sono due suoni, e lo schermo si ridisegna solo dove cambia. La frase di Knuth in copertina giustifica l'ordine del lavoro: prima si è reso il gioco corretto, e solo ora, con una misura in mano, lo si rende veloce. Ottimizzare senza misurare è tirare a indovinare, e il tutorial si chiude misurando l'effetto delle proprie modifiche.
 Stato di apprendimento: DA COMPRENDERE OGGI, alla fine di questa lezione lo spiegate, lo seguite passo passo e lo applicate da soli; DA UTILIZZARE OGGI, oggi seguite e usate la ricetta; come funziona dentro si spiega più avanti, o non fa parte del corso; DA COMPRENDERE PIÙ AVANTI, riconoscete il nome e lo scopo; lo spiega una lezione successiva. Una slide senza etichetta è contesto: una storia, un esempio, una domanda, un esercizio.
 Stato di apprendimento di questa lezione. DA COMPRENDERE OGGI: quoziente e resto; caratteri e stringhe; la virgola fissa; la convenzione di chiamata; gli array in memoria; macchine a stati finiti; il frame buffer; il ciclo del processore. DA UTILIZZARE OGGI: gli strumenti di PRG32, il debugger di PRG32-QT (si usa, non si studia, in questo corso). DA COMPRENDERE PIÙ AVANTI: niente. Una slide senza etichetta è contesto: una storia, un esempio, una domanda, un esercizio.
+Percorso. I risultati di oggi: (1) trasformare un numero in cifre decimali con divu e remu; (2) disegnare solo ciò che è cambiato, con un flag dirty; (3) completare il gioco: livelli, suono, velocità. Si appoggia su: caratteri e stringhe (Lezione 04); la virgola fissa (Lezione 06); la convenzione di chiamata (Lezione 18); gli array in memoria (Lezione 04); macchine a stati finiti (Lezione 13). Prossimo passo: Lezione 23, Verm1 sul Cartridge Store.
 Per il docente: Quarto tutorial del progetto. Usa le Lezioni da 18 a 21: i registri per convenzione, lo stack, moltiplicazione e divisione (18), il ciclo del processore e il costo di un'istruzione (19), il frame buffer e il costo del disegno (20), ingresso, suono e il runtime come padrone dei dispositivi (21). Il file di riferimento è verm1/verm1_part4.S. La frase di Knuth è il motto giusto: il gioco è stato fatto funzionare nella Parte 3, e solo adesso, con una misura in mano, lo rendiamo veloce.</a:t>
             </a:r>
             <a:endParaRPr lang="en-US" dirty="0"/>
@@ -828,7 +829,7 @@
             <a:r>
               <a:rPr lang="en-US" dirty="0"/>
               <a:t>Verm1 è finito: circa seicento righe di assembly RISC-V, ognuna scritta dallo studente. È nato come tre funzioni che si limitavano a ritornare ed è cresciuto un passo eseguibile alla volta, e ogni parte del corso vi è presente: numeri, logica, stato, memoria, chiamate di procedura, pixel e dispositivi. Resta una cosa: un programma che solo il suo autore può eseguire è finito a metà. La prossima lezione gli dà un nome, un'icona e dei crediti, e lo pubblica.
-Stato di apprendimento, riepilogo. DA COMPRENDERE OGGI: quoziente e resto; caratteri e stringhe; la virgola fissa; la convenzione di chiamata; gli array in memoria; macchine a stati finiti; il frame buffer; il ciclo del processore. DA UTILIZZARE OGGI: gli strumenti di PRG32, il debugger di PRG32-QT (si usa, non si studia, in questo corso). DA COMPRENDERE PIÙ AVANTI: niente. Una slide senza etichetta è contesto: una storia, un esempio, una domanda, un esercizio.
+Stato di apprendimento, riepilogo. DA COMPRENDERE OGGI: quoziente e resto; caratteri e stringhe; la virgola fissa; la convenzione di chiamata; gli array in memoria; macchine a stati finiti; il frame buffer; il ciclo del processore. DA UTILIZZARE OGGI: gli strumenti di PRG32, il debugger di PRG32-QT (si usa, non si studia, in questo corso). DA COMPRENDERE PIÙ AVANTI: niente. Una slide senza etichetta è contesto: una storia, un esempio, una domanda, un esercizio. Il filo della lezione: Verm1 è finito: ogni argomento del corso vi ha una riga. Prossimo passo: dargli un nome, un'icona e un posto sullo Store. Biglietto d'uscita (da due a quattro minuti, da soli, su carta): 1. to_decimal riceve 205. Mostrate come remu e divu per 10 ne danno le tre cifre, e perché memorizza i byte '2', '0', '5' invece dei numeri 2, 0, 5. 2. Perché verm1_draw ridisegna la mappa solo quando dirty è impostato? Che cosa vedrebbe il giocatore se update si dimenticasse di impostarlo dopo un passo?
 Per il docente: Chiedete agli studenti di portare la propria variante alla Lezione 23: il bundle che preparano deve essere del loro gioco, non del riferimento.</a:t>
             </a:r>
             <a:endParaRPr lang="en-US" dirty="0"/>
